--- a/downloads/DCT_V2_Ch07_Slides.pptx
+++ b/downloads/DCT_V2_Ch07_Slides.pptx
@@ -129,7 +129,7 @@
   <p:extLst>
     <p:ext uri="{521415D9-36F7-43E2-AB2F-B90AF26B5E84}">
       <p14:sectionLst xmlns:p14="http://schemas.microsoft.com/office/powerpoint/2010/main">
-        <p14:section name="Opening" id="{b6bca862-28ac-128d-64da-395cd17f0c10}">
+        <p14:section name="Opening" id="{b1cb1420-b4db-7606-8454-7e2c072a73b5}">
           <p14:sldIdLst>
             <p14:sldId id="256"/>
             <p14:sldId id="257"/>
@@ -137,37 +137,37 @@
             <p14:sldId id="259"/>
           </p14:sldIdLst>
         </p14:section>
-        <p14:section name="7.1 From Prices to Values" id="{ca7d0345-e9f3-047d-0283-dd1a7af29f95}">
+        <p14:section name="7.1 From Prices to Values" id="{c165bf8d-3fa2-4855-7ffb-c1f9aae10aad}">
           <p14:sldIdLst>
             <p14:sldId id="260"/>
             <p14:sldId id="261"/>
             <p14:sldId id="262"/>
           </p14:sldIdLst>
         </p14:section>
-        <p14:section name="7.2 The Bellman Equation" id="{9a21058b-4d4a-8af5-cdb4-b696d938bd72}">
+        <p14:section name="7.2 The Bellman Equation" id="{55100e44-f038-d487-c448-36401e5598c6}">
           <p14:sldIdLst>
             <p14:sldId id="263"/>
             <p14:sldId id="264"/>
             <p14:sldId id="265"/>
           </p14:sldIdLst>
         </p14:section>
-        <p14:section name="7.3 Thresholds and Targets" id="{8a1a5c47-f97f-c84a-f22d-e42df28107e6}">
+        <p14:section name="7.3 Thresholds and Targets" id="{5d539172-a183-b998-279b-85b8555b782b}">
           <p14:sldIdLst>
             <p14:sldId id="266"/>
           </p14:sldIdLst>
         </p14:section>
-        <p14:section name="7.4 Plans, Re-plans, and Rules" id="{fda6c236-83fe-85bc-7c7f-cc7806e184a7}">
+        <p14:section name="7.4 Plans, Re-plans, and Rules" id="{e11e6664-1a05-87a8-2404-714c1ff3f52b}">
           <p14:sldIdLst>
             <p14:sldId id="267"/>
           </p14:sldIdLst>
         </p14:section>
-        <p14:section name="7.5 Computing Values and Rules" id="{425bd063-d1cc-2fa4-e54b-0f60a325a016}">
+        <p14:section name="7.5 Computing Values and Rules" id="{913d07b5-2ce6-8bf4-cb9d-d06f5042ec7a}">
           <p14:sldIdLst>
             <p14:sldId id="268"/>
             <p14:sldId id="269"/>
           </p14:sldIdLst>
         </p14:section>
-        <p14:section name="Worked Example 7.1" id="{ca4071e6-7335-d997-fd04-a9ae9a20ab56}">
+        <p14:section name="Worked Example 7.1" id="{3edd05b2-3ebe-513e-178d-a1f7c6c2df45}">
           <p14:sldIdLst>
             <p14:sldId id="270"/>
             <p14:sldId id="271"/>
@@ -176,12 +176,12 @@
             <p14:sldId id="274"/>
           </p14:sldIdLst>
         </p14:section>
-        <p14:section name="AXIOM Lab 2.7" id="{2f47ef31-4e33-247d-9657-19467401baaa}">
+        <p14:section name="AXIOM Lab 2.7" id="{9d7e608a-a7d3-451b-24ac-6066ee770cc6}">
           <p14:sldIdLst>
             <p14:sldId id="275"/>
           </p14:sldIdLst>
         </p14:section>
-        <p14:section name="Close" id="{a07c6ea0-fdc8-b0a2-af10-d14605666759}">
+        <p14:section name="Close" id="{c2b8468e-7f53-81fc-93bf-f5eecd93f59b}">
           <p14:sldIdLst>
             <p14:sldId id="276"/>
             <p14:sldId id="277"/>

--- a/downloads/DCT_V2_Ch07_Slides.pptx
+++ b/downloads/DCT_V2_Ch07_Slides.pptx
@@ -129,7 +129,7 @@
   <p:extLst>
     <p:ext uri="{521415D9-36F7-43E2-AB2F-B90AF26B5E84}">
       <p14:sectionLst xmlns:p14="http://schemas.microsoft.com/office/powerpoint/2010/main">
-        <p14:section name="Opening" id="{b1cb1420-b4db-7606-8454-7e2c072a73b5}">
+        <p14:section name="Opening" id="{460cdfd1-8879-c2c9-58f3-e34e2175dcb9}">
           <p14:sldIdLst>
             <p14:sldId id="256"/>
             <p14:sldId id="257"/>
@@ -137,37 +137,37 @@
             <p14:sldId id="259"/>
           </p14:sldIdLst>
         </p14:section>
-        <p14:section name="7.1 From Prices to Values" id="{c165bf8d-3fa2-4855-7ffb-c1f9aae10aad}">
+        <p14:section name="7.1 From Prices to Values" id="{75595986-d7c0-eb1f-d162-910640511fd7}">
           <p14:sldIdLst>
             <p14:sldId id="260"/>
             <p14:sldId id="261"/>
             <p14:sldId id="262"/>
           </p14:sldIdLst>
         </p14:section>
-        <p14:section name="7.2 The Bellman Equation" id="{55100e44-f038-d487-c448-36401e5598c6}">
+        <p14:section name="7.2 The Bellman Equation" id="{1c2e4a69-76a3-6535-406e-d6a7acffca42}">
           <p14:sldIdLst>
             <p14:sldId id="263"/>
             <p14:sldId id="264"/>
             <p14:sldId id="265"/>
           </p14:sldIdLst>
         </p14:section>
-        <p14:section name="7.3 Thresholds and Targets" id="{5d539172-a183-b998-279b-85b8555b782b}">
+        <p14:section name="7.3 Thresholds and Targets" id="{a568b5ef-7bef-0062-fc43-7167987cc0ec}">
           <p14:sldIdLst>
             <p14:sldId id="266"/>
           </p14:sldIdLst>
         </p14:section>
-        <p14:section name="7.4 Plans, Re-plans, and Rules" id="{e11e6664-1a05-87a8-2404-714c1ff3f52b}">
+        <p14:section name="7.4 Plans, Re-plans, and Rules" id="{9927d48e-92a1-0ca6-6eff-2d2b0e364a6b}">
           <p14:sldIdLst>
             <p14:sldId id="267"/>
           </p14:sldIdLst>
         </p14:section>
-        <p14:section name="7.5 Computing Values and Rules" id="{913d07b5-2ce6-8bf4-cb9d-d06f5042ec7a}">
+        <p14:section name="7.5 Computing Values and Rules" id="{6cf15246-274f-67db-c27d-d37c761d8ee1}">
           <p14:sldIdLst>
             <p14:sldId id="268"/>
             <p14:sldId id="269"/>
           </p14:sldIdLst>
         </p14:section>
-        <p14:section name="Worked Example 7.1" id="{3edd05b2-3ebe-513e-178d-a1f7c6c2df45}">
+        <p14:section name="Worked Example 7.1" id="{27ebedda-34d1-a8f1-7a05-7d649a3b0a8e}">
           <p14:sldIdLst>
             <p14:sldId id="270"/>
             <p14:sldId id="271"/>
@@ -176,12 +176,12 @@
             <p14:sldId id="274"/>
           </p14:sldIdLst>
         </p14:section>
-        <p14:section name="AXIOM Lab 2.7" id="{9d7e608a-a7d3-451b-24ac-6066ee770cc6}">
+        <p14:section name="AXIOM Lab 2.7" id="{8b30a140-de7d-02bd-f0d5-5646d3cb34b0}">
           <p14:sldIdLst>
             <p14:sldId id="275"/>
           </p14:sldIdLst>
         </p14:section>
-        <p14:section name="Close" id="{c2b8468e-7f53-81fc-93bf-f5eecd93f59b}">
+        <p14:section name="Close" id="{c65176b5-ffab-3241-1351-06e886494cda}">
           <p14:sldIdLst>
             <p14:sldId id="276"/>
             <p14:sldId id="277"/>

--- a/downloads/DCT_V2_Ch07_Slides.pptx
+++ b/downloads/DCT_V2_Ch07_Slides.pptx
@@ -28,9 +28,10 @@
     <p:sldId id="276" r:id="rId22"/>
     <p:sldId id="277" r:id="rId23"/>
     <p:sldId id="278" r:id="rId24"/>
+    <p:sldId id="279" r:id="rId25"/>
   </p:sldIdLst>
   <p:notesMasterIdLst>
-    <p:notesMasterId r:id="rId25"/>
+    <p:notesMasterId r:id="rId26"/>
   </p:notesMasterIdLst>
   <p:sldSz cx="12192000" cy="6858000"/>
   <p:notesSz cx="6858000" cy="12192000"/>
@@ -129,7 +130,7 @@
   <p:extLst>
     <p:ext uri="{521415D9-36F7-43E2-AB2F-B90AF26B5E84}">
       <p14:sectionLst xmlns:p14="http://schemas.microsoft.com/office/powerpoint/2010/main">
-        <p14:section name="Opening" id="{460cdfd1-8879-c2c9-58f3-e34e2175dcb9}">
+        <p14:section name="Opening" id="{949b8536-4bc6-b721-9bdc-aa4f1667ad22}">
           <p14:sldIdLst>
             <p14:sldId id="256"/>
             <p14:sldId id="257"/>
@@ -137,37 +138,37 @@
             <p14:sldId id="259"/>
           </p14:sldIdLst>
         </p14:section>
-        <p14:section name="7.1 From Prices to Values" id="{75595986-d7c0-eb1f-d162-910640511fd7}">
+        <p14:section name="7.1 From Prices to Values" id="{3afb4301-db61-5aad-fd64-8a5d3a77535e}">
           <p14:sldIdLst>
             <p14:sldId id="260"/>
             <p14:sldId id="261"/>
             <p14:sldId id="262"/>
           </p14:sldIdLst>
         </p14:section>
-        <p14:section name="7.2 The Bellman Equation" id="{1c2e4a69-76a3-6535-406e-d6a7acffca42}">
+        <p14:section name="7.2 The Bellman Equation" id="{1eba0348-a719-5115-944c-cdb17f756081}">
           <p14:sldIdLst>
             <p14:sldId id="263"/>
             <p14:sldId id="264"/>
             <p14:sldId id="265"/>
           </p14:sldIdLst>
         </p14:section>
-        <p14:section name="7.3 Thresholds and Targets" id="{a568b5ef-7bef-0062-fc43-7167987cc0ec}">
+        <p14:section name="7.3 Thresholds and Targets" id="{8a351ba3-aa8e-5c97-1ef8-3727791e8be1}">
           <p14:sldIdLst>
             <p14:sldId id="266"/>
           </p14:sldIdLst>
         </p14:section>
-        <p14:section name="7.4 Plans, Re-plans, and Rules" id="{9927d48e-92a1-0ca6-6eff-2d2b0e364a6b}">
+        <p14:section name="7.4 Plans, Re-plans, and Rules" id="{5cdfb403-867b-133f-ef70-42cceaa4d7d3}">
           <p14:sldIdLst>
             <p14:sldId id="267"/>
           </p14:sldIdLst>
         </p14:section>
-        <p14:section name="7.5 Computing Values and Rules" id="{6cf15246-274f-67db-c27d-d37c761d8ee1}">
+        <p14:section name="7.5 Computing Values and Rules" id="{590ea794-bbb8-05ac-0eed-c994ac5d619f}">
           <p14:sldIdLst>
             <p14:sldId id="268"/>
             <p14:sldId id="269"/>
           </p14:sldIdLst>
         </p14:section>
-        <p14:section name="Worked Example 7.1" id="{27ebedda-34d1-a8f1-7a05-7d649a3b0a8e}">
+        <p14:section name="Worked Example 7.1" id="{89efab5e-c2b7-052d-63f2-ee772052a626}">
           <p14:sldIdLst>
             <p14:sldId id="270"/>
             <p14:sldId id="271"/>
@@ -176,16 +177,21 @@
             <p14:sldId id="274"/>
           </p14:sldIdLst>
         </p14:section>
-        <p14:section name="AXIOM Lab 2.7" id="{8b30a140-de7d-02bd-f0d5-5646d3cb34b0}">
+        <p14:section name="In Practice" id="{0a3f6532-4ff3-bb1f-04aa-bbeaffec57a1}">
           <p14:sldIdLst>
             <p14:sldId id="275"/>
           </p14:sldIdLst>
         </p14:section>
-        <p14:section name="Close" id="{c65176b5-ffab-3241-1351-06e886494cda}">
+        <p14:section name="AXIOM Lab 2.7" id="{e81ccdb4-0963-e982-cce7-7d1ece4b02e3}">
           <p14:sldIdLst>
             <p14:sldId id="276"/>
+          </p14:sldIdLst>
+        </p14:section>
+        <p14:section name="Close" id="{d463dc0f-3372-910a-9458-4e2ba3ce1a4a}">
+          <p14:sldIdLst>
             <p14:sldId id="277"/>
             <p14:sldId id="278"/>
+            <p14:sldId id="279"/>
           </p14:sldIdLst>
         </p14:section>
       </p14:sectionLst>
@@ -1930,7 +1936,7 @@
           <a:p>
             <a:r>
               <a:rPr lang="en-US" dirty="0"/>
-              <a:t>AXIOM Lab 2.7. What to look for: values that converge from any start; prices that fall as capability grows; a target rule with a margin; error bounds that hold; a recursion that approaches Chapter 6's solution as the period shrinks.</a:t>
+              <a:t>In Practice, Chapter 7: American Airlines Prices Its Last Seat. A real organization's decision of this chapter's kind, told from its published record; every figure is cited in the book. The lesson for Meridian: A margin above a floor is sized like a protection level: by a critical ratio. Sources: Smith, Leimkuhler and Darrow (1992), Interfaces; McGill and van Ryzin (1999); Talluri et al. (2008); INFORMS; Cross (1997).</a:t>
             </a:r>
             <a:endParaRPr lang="en-US" dirty="0"/>
           </a:p>
@@ -2018,7 +2024,7 @@
           <a:p>
             <a:r>
               <a:rPr lang="en-US" dirty="0"/>
-              <a:t>Key Takeaways, Chapter 7.</a:t>
+              <a:t>AXIOM Lab 2.7. What to look for: values that converge from any start; prices that fall as capability grows; a target rule with a margin; error bounds that hold; a recursion that approaches Chapter 6's solution as the period shrinks.</a:t>
             </a:r>
             <a:endParaRPr lang="en-US" dirty="0"/>
           </a:p>
@@ -2106,7 +2112,7 @@
           <a:p>
             <a:r>
               <a:rPr lang="en-US" dirty="0"/>
-              <a:t>The notebook and workbook are on the course website, www.dynamiccorporatetransformation.com.</a:t>
+              <a:t>Key Takeaways, Chapter 7.</a:t>
             </a:r>
             <a:endParaRPr lang="en-US" dirty="0"/>
           </a:p>
@@ -2194,7 +2200,7 @@
           <a:p>
             <a:r>
               <a:rPr lang="en-US" dirty="0"/>
-              <a:t>Section 7.5's bridge to Chapter 8.</a:t>
+              <a:t>The notebook and workbook are on the course website, www.dynamiccorporatetransformation.com.</a:t>
             </a:r>
             <a:endParaRPr lang="en-US" dirty="0"/>
           </a:p>
@@ -2218,6 +2224,94 @@
             <a:fld id="{F7021451-1387-4CA6-816F-3879F97B5CBC}" type="slidenum">
               <a:rPr lang="en-US"/>
               <a:t>23</a:t>
+            </a:fld>
+            <a:endParaRPr lang="en-US"/>
+          </a:p>
+        </p:txBody>
+      </p:sp>
+    </p:spTree>
+    <p:extLst>
+      <p:ext uri="{BB962C8B-B14F-4D97-AF65-F5344CB8AC3E}">
+        <p14:creationId xmlns:p14="http://schemas.microsoft.com/office/powerpoint/2010/main" val="1024086991"/>
+      </p:ext>
+    </p:extLst>
+  </p:cSld>
+  <p:clrMapOvr>
+    <a:masterClrMapping/>
+  </p:clrMapOvr>
+</p:notes>
+</file>
+
+<file path=ppt/notesSlides/notesSlide24.xml><?xml version="1.0" encoding="utf-8"?>
+<p:notes xmlns:a="http://schemas.openxmlformats.org/drawingml/2006/main" xmlns:r="http://schemas.openxmlformats.org/officeDocument/2006/relationships" xmlns:p="http://schemas.openxmlformats.org/presentationml/2006/main">
+  <p:cSld>
+    <p:spTree>
+      <p:nvGrpSpPr>
+        <p:cNvPr id="1" name=""/>
+        <p:cNvGrpSpPr/>
+        <p:nvPr/>
+      </p:nvGrpSpPr>
+      <p:grpSpPr>
+        <a:xfrm>
+          <a:off x="0" y="0"/>
+          <a:ext cx="0" cy="0"/>
+          <a:chOff x="0" y="0"/>
+          <a:chExt cx="0" cy="0"/>
+        </a:xfrm>
+      </p:grpSpPr>
+      <p:sp>
+        <p:nvSpPr>
+          <p:cNvPr id="2" name="Slide Image Placeholder 1"/>
+          <p:cNvSpPr>
+            <a:spLocks noGrp="1" noRot="1" noChangeAspect="1"/>
+          </p:cNvSpPr>
+          <p:nvPr>
+            <p:ph type="sldImg"/>
+          </p:nvPr>
+        </p:nvSpPr>
+        <p:spPr/>
+      </p:sp>
+      <p:sp>
+        <p:nvSpPr>
+          <p:cNvPr id="3" name="Notes Placeholder 2"/>
+          <p:cNvSpPr>
+            <a:spLocks noGrp="1"/>
+          </p:cNvSpPr>
+          <p:nvPr>
+            <p:ph type="body" idx="1"/>
+          </p:nvPr>
+        </p:nvSpPr>
+        <p:spPr/>
+        <p:txBody>
+          <a:bodyPr/>
+          <a:lstStyle/>
+          <a:p>
+            <a:r>
+              <a:rPr lang="en-US" dirty="0"/>
+              <a:t>Section 7.5's bridge to Chapter 8.</a:t>
+            </a:r>
+            <a:endParaRPr lang="en-US" dirty="0"/>
+          </a:p>
+        </p:txBody>
+      </p:sp>
+      <p:sp>
+        <p:nvSpPr>
+          <p:cNvPr id="4" name="Slide Number Placeholder 3"/>
+          <p:cNvSpPr>
+            <a:spLocks noGrp="1"/>
+          </p:cNvSpPr>
+          <p:nvPr>
+            <p:ph type="sldNum" sz="quarter" idx="10"/>
+          </p:nvPr>
+        </p:nvSpPr>
+        <p:spPr/>
+        <p:txBody>
+          <a:bodyPr/>
+          <a:lstStyle/>
+          <a:p>
+            <a:fld id="{F7021451-1387-4CA6-816F-3879F97B5CBC}" type="slidenum">
+              <a:rPr lang="en-US"/>
+              <a:t>24</a:t>
             </a:fld>
             <a:endParaRPr lang="en-US"/>
           </a:p>
@@ -13535,7 +13629,7 @@
                   <a:schemeClr val="accent1"/>
                 </a:solidFill>
               </a:rPr>
-              <a:t>AXIOM LAB 2.7 · MODULE AXIOM-07</a:t>
+              <a:t>IN PRACTICE · AMERICAN AIRLINES</a:t>
             </a:r>
             <a:endParaRPr lang="en-US" sz="1200" dirty="0"/>
           </a:p>
@@ -13576,804 +13670,26 @@
                 <a:ea typeface="Cambria" pitchFamily="34" charset="-122"/>
                 <a:cs typeface="Cambria" pitchFamily="34" charset="-120"/>
               </a:rPr>
-              <a:t>Valuing every position, in AXIOM</a:t>
+              <a:t>American Airlines prices its last seat</a:t>
             </a:r>
             <a:endParaRPr lang="en-US" sz="3200" dirty="0"/>
           </a:p>
         </p:txBody>
       </p:sp>
-      <p:pic>
-        <p:nvPicPr>
-          <p:cNvPr id="5" name="AXIOM logo" descr="AXIOM">    </p:cNvPr>
-          <p:cNvPicPr>
-            <a:picLocks noChangeAspect="1"/>
-          </p:cNvPicPr>
-          <p:nvPr/>
-        </p:nvPicPr>
-        <p:blipFill>
-          <a:blip r:embed="rId1"/>
-          <a:stretch>
-            <a:fillRect/>
-          </a:stretch>
-        </p:blipFill>
-        <p:spPr>
-          <a:xfrm>
-            <a:off x="9539935" y="310896"/>
-            <a:ext cx="2103120" cy="420624"/>
-          </a:xfrm>
-          <a:prstGeom prst="rect">
-            <a:avLst/>
-          </a:prstGeom>
-        </p:spPr>
-      </p:pic>
-      <p:sp>
-        <p:nvSpPr>
-          <p:cNvPr id="6" name="Situation"/>
-          <p:cNvSpPr txBox="1"/>
-          <p:nvPr/>
-        </p:nvSpPr>
-        <p:spPr>
-          <a:xfrm>
-            <a:off x="548640" y="1645920"/>
-            <a:ext cx="11094415" cy="777240"/>
-          </a:xfrm>
-          <a:prstGeom prst="rect">
-            <a:avLst/>
-          </a:prstGeom>
-          <a:noFill/>
-          <a:ln/>
-        </p:spPr>
-        <p:txBody>
-          <a:bodyPr wrap="square" lIns="0" tIns="0" rIns="0" bIns="0" rtlCol="0" anchor="t"/>
-          <a:lstStyle/>
-          <a:p>
-            <a:pPr indent="0" marL="0">
-              <a:buNone/>
-            </a:pPr>
-            <a:r>
-              <a:rPr lang="en-US" sz="1500" dirty="0">
-                <a:solidFill>
-                  <a:schemeClr val="tx1"/>
-                </a:solidFill>
-              </a:rPr>
-              <a:t>The board has accepted Chapter 6's advice to stop defending 58. Capability does not move as planned, and the chief human resources officer must propose a hiring rule with a margin over the floor. Open AXIOM, choose Lab 2.7 and load the Meridian capability instance with the engineering office's record.</a:t>
-            </a:r>
-            <a:endParaRPr lang="en-US" sz="1500" dirty="0"/>
-          </a:p>
-        </p:txBody>
-      </p:sp>
-      <p:sp>
-        <p:nvSpPr>
-          <p:cNvPr id="7" name="Flow line"/>
+      <p:sp>
+        <p:nvSpPr>
+          <p:cNvPr id="5" name="Card"/>
           <p:cNvSpPr/>
           <p:nvPr/>
         </p:nvSpPr>
         <p:spPr>
           <a:xfrm>
-            <a:off x="1658082" y="2880360"/>
-            <a:ext cx="8875532" cy="0"/>
-          </a:xfrm>
-          <a:prstGeom prst="line">
-            <a:avLst/>
-          </a:prstGeom>
-          <a:noFill/>
-          <a:ln w="25400">
-            <a:solidFill>
-              <a:srgbClr val="C4CBD8"/>
-            </a:solidFill>
-            <a:prstDash val="solid"/>
-          </a:ln>
-        </p:spPr>
-      </p:sp>
-      <p:sp>
-        <p:nvSpPr>
-          <p:cNvPr id="8" name="Number"/>
-          <p:cNvSpPr/>
-          <p:nvPr/>
-        </p:nvSpPr>
-        <p:spPr>
-          <a:xfrm>
-            <a:off x="1383762" y="2606040"/>
-            <a:ext cx="548640" cy="548640"/>
-          </a:xfrm>
-          <a:prstGeom prst="ellipse">
-            <a:avLst/>
-          </a:prstGeom>
-          <a:solidFill>
-            <a:schemeClr val="accent1"/>
-          </a:solidFill>
-          <a:ln w="6350">
-            <a:solidFill>
-              <a:schemeClr val="accent1"/>
-            </a:solidFill>
-            <a:prstDash val="solid"/>
-          </a:ln>
-        </p:spPr>
-      </p:sp>
-      <p:sp>
-        <p:nvSpPr>
-          <p:cNvPr id="9" name="Text 5"/>
-          <p:cNvSpPr txBox="1"/>
-          <p:nvPr/>
-        </p:nvSpPr>
-        <p:spPr>
-          <a:xfrm>
-            <a:off x="1383762" y="2606040"/>
-            <a:ext cx="548640" cy="548640"/>
-          </a:xfrm>
-          <a:prstGeom prst="rect">
-            <a:avLst/>
-          </a:prstGeom>
-          <a:noFill/>
-          <a:ln/>
-        </p:spPr>
-        <p:txBody>
-          <a:bodyPr wrap="square" lIns="0" tIns="0" rIns="0" bIns="0" rtlCol="0" anchor="ctr"/>
-          <a:lstStyle/>
-          <a:p>
-            <a:pPr algn="ctr" indent="0" marL="0">
-              <a:buNone/>
-            </a:pPr>
-            <a:r>
-              <a:rPr lang="en-US" sz="1600" b="1" dirty="0">
-                <a:solidFill>
-                  <a:schemeClr val="bg1"/>
-                </a:solidFill>
-                <a:latin typeface="Calibri" pitchFamily="34" charset="0"/>
-                <a:ea typeface="Calibri" pitchFamily="34" charset="-122"/>
-                <a:cs typeface="Calibri" pitchFamily="34" charset="-120"/>
-              </a:rPr>
-              <a:t>1</a:t>
-            </a:r>
-            <a:endParaRPr lang="en-US" sz="1600" dirty="0"/>
-          </a:p>
-        </p:txBody>
-      </p:sp>
-      <p:sp>
-        <p:nvSpPr>
-          <p:cNvPr id="10" name="Flow head"/>
-          <p:cNvSpPr txBox="1"/>
-          <p:nvPr/>
-        </p:nvSpPr>
-        <p:spPr>
-          <a:xfrm>
-            <a:off x="621792" y="3291840"/>
-            <a:ext cx="2072579" cy="548640"/>
-          </a:xfrm>
-          <a:prstGeom prst="rect">
-            <a:avLst/>
-          </a:prstGeom>
-          <a:noFill/>
-          <a:ln/>
-        </p:spPr>
-        <p:txBody>
-          <a:bodyPr wrap="square" lIns="0" tIns="0" rIns="0" bIns="0" rtlCol="0" anchor="t"/>
-          <a:lstStyle/>
-          <a:p>
-            <a:pPr algn="ctr" indent="0" marL="0">
-              <a:buNone/>
-            </a:pPr>
-            <a:r>
-              <a:rPr lang="en-US" sz="1600" b="1" dirty="0">
-                <a:solidFill>
-                  <a:schemeClr val="tx1"/>
-                </a:solidFill>
-                <a:latin typeface="Cambria" pitchFamily="34" charset="0"/>
-                <a:ea typeface="Cambria" pitchFamily="34" charset="-122"/>
-                <a:cs typeface="Cambria" pitchFamily="34" charset="-120"/>
-              </a:rPr>
-              <a:t>Look one quarter ahead</a:t>
-            </a:r>
-            <a:endParaRPr lang="en-US" sz="1600" dirty="0"/>
-          </a:p>
-        </p:txBody>
-      </p:sp>
-      <p:sp>
-        <p:nvSpPr>
-          <p:cNvPr id="11" name="Flow text"/>
-          <p:cNvSpPr txBox="1"/>
-          <p:nvPr/>
-        </p:nvSpPr>
-        <p:spPr>
-          <a:xfrm>
-            <a:off x="640080" y="3867912"/>
-            <a:ext cx="2036003" cy="1554480"/>
-          </a:xfrm>
-          <a:prstGeom prst="rect">
-            <a:avLst/>
-          </a:prstGeom>
-          <a:noFill/>
-          <a:ln/>
-        </p:spPr>
-        <p:txBody>
-          <a:bodyPr wrap="square" lIns="0" tIns="0" rIns="0" bIns="0" rtlCol="0" anchor="t"/>
-          <a:lstStyle/>
-          <a:p>
-            <a:pPr algn="ctr" indent="0" marL="0">
-              <a:buNone/>
-            </a:pPr>
-            <a:r>
-              <a:rPr lang="en-US" sz="1400" dirty="0">
-                <a:solidFill>
-                  <a:schemeClr val="tx2"/>
-                </a:solidFill>
-              </a:rPr>
-              <a:t>Plot the value of each hiring decision at a capability level and find the best.</a:t>
-            </a:r>
-            <a:endParaRPr lang="en-US" sz="1400" dirty="0"/>
-          </a:p>
-        </p:txBody>
-      </p:sp>
-      <p:sp>
-        <p:nvSpPr>
-          <p:cNvPr id="12" name="Number"/>
-          <p:cNvSpPr/>
-          <p:nvPr/>
-        </p:nvSpPr>
-        <p:spPr>
-          <a:xfrm>
-            <a:off x="3602645" y="2606040"/>
-            <a:ext cx="548640" cy="548640"/>
-          </a:xfrm>
-          <a:prstGeom prst="ellipse">
-            <a:avLst/>
-          </a:prstGeom>
-          <a:solidFill>
-            <a:schemeClr val="accent1"/>
-          </a:solidFill>
-          <a:ln w="6350">
-            <a:solidFill>
-              <a:schemeClr val="accent1"/>
-            </a:solidFill>
-            <a:prstDash val="solid"/>
-          </a:ln>
-        </p:spPr>
-      </p:sp>
-      <p:sp>
-        <p:nvSpPr>
-          <p:cNvPr id="13" name="Text 9"/>
-          <p:cNvSpPr txBox="1"/>
-          <p:nvPr/>
-        </p:nvSpPr>
-        <p:spPr>
-          <a:xfrm>
-            <a:off x="3602645" y="2606040"/>
-            <a:ext cx="548640" cy="548640"/>
-          </a:xfrm>
-          <a:prstGeom prst="rect">
-            <a:avLst/>
-          </a:prstGeom>
-          <a:noFill/>
-          <a:ln/>
-        </p:spPr>
-        <p:txBody>
-          <a:bodyPr wrap="square" lIns="0" tIns="0" rIns="0" bIns="0" rtlCol="0" anchor="ctr"/>
-          <a:lstStyle/>
-          <a:p>
-            <a:pPr algn="ctr" indent="0" marL="0">
-              <a:buNone/>
-            </a:pPr>
-            <a:r>
-              <a:rPr lang="en-US" sz="1600" b="1" dirty="0">
-                <a:solidFill>
-                  <a:schemeClr val="bg1"/>
-                </a:solidFill>
-                <a:latin typeface="Calibri" pitchFamily="34" charset="0"/>
-                <a:ea typeface="Calibri" pitchFamily="34" charset="-122"/>
-                <a:cs typeface="Calibri" pitchFamily="34" charset="-120"/>
-              </a:rPr>
-              <a:t>2</a:t>
-            </a:r>
-            <a:endParaRPr lang="en-US" sz="1600" dirty="0"/>
-          </a:p>
-        </p:txBody>
-      </p:sp>
-      <p:sp>
-        <p:nvSpPr>
-          <p:cNvPr id="14" name="Flow head"/>
-          <p:cNvSpPr txBox="1"/>
-          <p:nvPr/>
-        </p:nvSpPr>
-        <p:spPr>
-          <a:xfrm>
-            <a:off x="2840675" y="3291840"/>
-            <a:ext cx="2072579" cy="548640"/>
-          </a:xfrm>
-          <a:prstGeom prst="rect">
-            <a:avLst/>
-          </a:prstGeom>
-          <a:noFill/>
-          <a:ln/>
-        </p:spPr>
-        <p:txBody>
-          <a:bodyPr wrap="square" lIns="0" tIns="0" rIns="0" bIns="0" rtlCol="0" anchor="t"/>
-          <a:lstStyle/>
-          <a:p>
-            <a:pPr algn="ctr" indent="0" marL="0">
-              <a:buNone/>
-            </a:pPr>
-            <a:r>
-              <a:rPr lang="en-US" sz="1600" b="1" dirty="0">
-                <a:solidFill>
-                  <a:schemeClr val="tx1"/>
-                </a:solidFill>
-                <a:latin typeface="Cambria" pitchFamily="34" charset="0"/>
-                <a:ea typeface="Cambria" pitchFamily="34" charset="-122"/>
-                <a:cs typeface="Cambria" pitchFamily="34" charset="-120"/>
-              </a:rPr>
-              <a:t>Solve backward</a:t>
-            </a:r>
-            <a:endParaRPr lang="en-US" sz="1600" dirty="0"/>
-          </a:p>
-        </p:txBody>
-      </p:sp>
-      <p:sp>
-        <p:nvSpPr>
-          <p:cNvPr id="15" name="Flow text"/>
-          <p:cNvSpPr txBox="1"/>
-          <p:nvPr/>
-        </p:nvSpPr>
-        <p:spPr>
-          <a:xfrm>
-            <a:off x="2858963" y="3867912"/>
-            <a:ext cx="2036003" cy="1554480"/>
-          </a:xfrm>
-          <a:prstGeom prst="rect">
-            <a:avLst/>
-          </a:prstGeom>
-          <a:noFill/>
-          <a:ln/>
-        </p:spPr>
-        <p:txBody>
-          <a:bodyPr wrap="square" lIns="0" tIns="0" rIns="0" bIns="0" rtlCol="0" anchor="t"/>
-          <a:lstStyle/>
-          <a:p>
-            <a:pPr algn="ctr" indent="0" marL="0">
-              <a:buNone/>
-            </a:pPr>
-            <a:r>
-              <a:rPr lang="en-US" sz="1400" dirty="0">
-                <a:solidFill>
-                  <a:schemeClr val="tx2"/>
-                </a:solidFill>
-              </a:rPr>
-              <a:t>Solve a twelve-quarter horizon by backward induction and read the rule table.</a:t>
-            </a:r>
-            <a:endParaRPr lang="en-US" sz="1400" dirty="0"/>
-          </a:p>
-        </p:txBody>
-      </p:sp>
-      <p:sp>
-        <p:nvSpPr>
-          <p:cNvPr id="16" name="Number"/>
-          <p:cNvSpPr/>
-          <p:nvPr/>
-        </p:nvSpPr>
-        <p:spPr>
-          <a:xfrm>
-            <a:off x="5821528" y="2606040"/>
-            <a:ext cx="548640" cy="548640"/>
-          </a:xfrm>
-          <a:prstGeom prst="ellipse">
-            <a:avLst/>
-          </a:prstGeom>
-          <a:solidFill>
-            <a:schemeClr val="accent1"/>
-          </a:solidFill>
-          <a:ln w="6350">
-            <a:solidFill>
-              <a:schemeClr val="accent1"/>
-            </a:solidFill>
-            <a:prstDash val="solid"/>
-          </a:ln>
-        </p:spPr>
-      </p:sp>
-      <p:sp>
-        <p:nvSpPr>
-          <p:cNvPr id="17" name="Text 13"/>
-          <p:cNvSpPr txBox="1"/>
-          <p:nvPr/>
-        </p:nvSpPr>
-        <p:spPr>
-          <a:xfrm>
-            <a:off x="5821528" y="2606040"/>
-            <a:ext cx="548640" cy="548640"/>
-          </a:xfrm>
-          <a:prstGeom prst="rect">
-            <a:avLst/>
-          </a:prstGeom>
-          <a:noFill/>
-          <a:ln/>
-        </p:spPr>
-        <p:txBody>
-          <a:bodyPr wrap="square" lIns="0" tIns="0" rIns="0" bIns="0" rtlCol="0" anchor="ctr"/>
-          <a:lstStyle/>
-          <a:p>
-            <a:pPr algn="ctr" indent="0" marL="0">
-              <a:buNone/>
-            </a:pPr>
-            <a:r>
-              <a:rPr lang="en-US" sz="1600" b="1" dirty="0">
-                <a:solidFill>
-                  <a:schemeClr val="bg1"/>
-                </a:solidFill>
-                <a:latin typeface="Calibri" pitchFamily="34" charset="0"/>
-                <a:ea typeface="Calibri" pitchFamily="34" charset="-122"/>
-                <a:cs typeface="Calibri" pitchFamily="34" charset="-120"/>
-              </a:rPr>
-              <a:t>3</a:t>
-            </a:r>
-            <a:endParaRPr lang="en-US" sz="1600" dirty="0"/>
-          </a:p>
-        </p:txBody>
-      </p:sp>
-      <p:sp>
-        <p:nvSpPr>
-          <p:cNvPr id="18" name="Flow head"/>
-          <p:cNvSpPr txBox="1"/>
-          <p:nvPr/>
-        </p:nvSpPr>
-        <p:spPr>
-          <a:xfrm>
-            <a:off x="5059558" y="3291840"/>
-            <a:ext cx="2072579" cy="548640"/>
-          </a:xfrm>
-          <a:prstGeom prst="rect">
-            <a:avLst/>
-          </a:prstGeom>
-          <a:noFill/>
-          <a:ln/>
-        </p:spPr>
-        <p:txBody>
-          <a:bodyPr wrap="square" lIns="0" tIns="0" rIns="0" bIns="0" rtlCol="0" anchor="t"/>
-          <a:lstStyle/>
-          <a:p>
-            <a:pPr algn="ctr" indent="0" marL="0">
-              <a:buNone/>
-            </a:pPr>
-            <a:r>
-              <a:rPr lang="en-US" sz="1600" b="1" dirty="0">
-                <a:solidFill>
-                  <a:schemeClr val="tx1"/>
-                </a:solidFill>
-                <a:latin typeface="Cambria" pitchFamily="34" charset="0"/>
-                <a:ea typeface="Cambria" pitchFamily="34" charset="-122"/>
-                <a:cs typeface="Cambria" pitchFamily="34" charset="-120"/>
-              </a:rPr>
-              <a:t>Iterate</a:t>
-            </a:r>
-            <a:endParaRPr lang="en-US" sz="1600" dirty="0"/>
-          </a:p>
-        </p:txBody>
-      </p:sp>
-      <p:sp>
-        <p:nvSpPr>
-          <p:cNvPr id="19" name="Flow text"/>
-          <p:cNvSpPr txBox="1"/>
-          <p:nvPr/>
-        </p:nvSpPr>
-        <p:spPr>
-          <a:xfrm>
-            <a:off x="5077846" y="3867912"/>
-            <a:ext cx="2036003" cy="1554480"/>
-          </a:xfrm>
-          <a:prstGeom prst="rect">
-            <a:avLst/>
-          </a:prstGeom>
-          <a:noFill/>
-          <a:ln/>
-        </p:spPr>
-        <p:txBody>
-          <a:bodyPr wrap="square" lIns="0" tIns="0" rIns="0" bIns="0" rtlCol="0" anchor="t"/>
-          <a:lstStyle/>
-          <a:p>
-            <a:pPr algn="ctr" indent="0" marL="0">
-              <a:buNone/>
-            </a:pPr>
-            <a:r>
-              <a:rPr lang="en-US" sz="1400" dirty="0">
-                <a:solidFill>
-                  <a:schemeClr val="tx2"/>
-                </a:solidFill>
-              </a:rPr>
-              <a:t>Value iteration with its stopping bound, then policy iteration from Volume I's rule.</a:t>
-            </a:r>
-            <a:endParaRPr lang="en-US" sz="1400" dirty="0"/>
-          </a:p>
-        </p:txBody>
-      </p:sp>
-      <p:sp>
-        <p:nvSpPr>
-          <p:cNvPr id="20" name="Number"/>
-          <p:cNvSpPr/>
-          <p:nvPr/>
-        </p:nvSpPr>
-        <p:spPr>
-          <a:xfrm>
-            <a:off x="8040411" y="2606040"/>
-            <a:ext cx="548640" cy="548640"/>
-          </a:xfrm>
-          <a:prstGeom prst="ellipse">
-            <a:avLst/>
-          </a:prstGeom>
-          <a:solidFill>
-            <a:schemeClr val="accent1"/>
-          </a:solidFill>
-          <a:ln w="6350">
-            <a:solidFill>
-              <a:schemeClr val="accent1"/>
-            </a:solidFill>
-            <a:prstDash val="solid"/>
-          </a:ln>
-        </p:spPr>
-      </p:sp>
-      <p:sp>
-        <p:nvSpPr>
-          <p:cNvPr id="21" name="Text 17"/>
-          <p:cNvSpPr txBox="1"/>
-          <p:nvPr/>
-        </p:nvSpPr>
-        <p:spPr>
-          <a:xfrm>
-            <a:off x="8040411" y="2606040"/>
-            <a:ext cx="548640" cy="548640"/>
-          </a:xfrm>
-          <a:prstGeom prst="rect">
-            <a:avLst/>
-          </a:prstGeom>
-          <a:noFill/>
-          <a:ln/>
-        </p:spPr>
-        <p:txBody>
-          <a:bodyPr wrap="square" lIns="0" tIns="0" rIns="0" bIns="0" rtlCol="0" anchor="ctr"/>
-          <a:lstStyle/>
-          <a:p>
-            <a:pPr algn="ctr" indent="0" marL="0">
-              <a:buNone/>
-            </a:pPr>
-            <a:r>
-              <a:rPr lang="en-US" sz="1600" b="1" dirty="0">
-                <a:solidFill>
-                  <a:schemeClr val="bg1"/>
-                </a:solidFill>
-                <a:latin typeface="Calibri" pitchFamily="34" charset="0"/>
-                <a:ea typeface="Calibri" pitchFamily="34" charset="-122"/>
-                <a:cs typeface="Calibri" pitchFamily="34" charset="-120"/>
-              </a:rPr>
-              <a:t>4</a:t>
-            </a:r>
-            <a:endParaRPr lang="en-US" sz="1600" dirty="0"/>
-          </a:p>
-        </p:txBody>
-      </p:sp>
-      <p:sp>
-        <p:nvSpPr>
-          <p:cNvPr id="22" name="Flow head"/>
-          <p:cNvSpPr txBox="1"/>
-          <p:nvPr/>
-        </p:nvSpPr>
-        <p:spPr>
-          <a:xfrm>
-            <a:off x="7278441" y="3291840"/>
-            <a:ext cx="2072579" cy="548640"/>
-          </a:xfrm>
-          <a:prstGeom prst="rect">
-            <a:avLst/>
-          </a:prstGeom>
-          <a:noFill/>
-          <a:ln/>
-        </p:spPr>
-        <p:txBody>
-          <a:bodyPr wrap="square" lIns="0" tIns="0" rIns="0" bIns="0" rtlCol="0" anchor="t"/>
-          <a:lstStyle/>
-          <a:p>
-            <a:pPr algn="ctr" indent="0" marL="0">
-              <a:buNone/>
-            </a:pPr>
-            <a:r>
-              <a:rPr lang="en-US" sz="1600" b="1" dirty="0">
-                <a:solidFill>
-                  <a:schemeClr val="tx1"/>
-                </a:solidFill>
-                <a:latin typeface="Cambria" pitchFamily="34" charset="0"/>
-                <a:ea typeface="Cambria" pitchFamily="34" charset="-122"/>
-                <a:cs typeface="Cambria" pitchFamily="34" charset="-120"/>
-              </a:rPr>
-              <a:t>Read values and prices</a:t>
-            </a:r>
-            <a:endParaRPr lang="en-US" sz="1600" dirty="0"/>
-          </a:p>
-        </p:txBody>
-      </p:sp>
-      <p:sp>
-        <p:nvSpPr>
-          <p:cNvPr id="23" name="Flow text"/>
-          <p:cNvSpPr txBox="1"/>
-          <p:nvPr/>
-        </p:nvSpPr>
-        <p:spPr>
-          <a:xfrm>
-            <a:off x="7296729" y="3867912"/>
-            <a:ext cx="2036003" cy="1554480"/>
-          </a:xfrm>
-          <a:prstGeom prst="rect">
-            <a:avLst/>
-          </a:prstGeom>
-          <a:noFill/>
-          <a:ln/>
-        </p:spPr>
-        <p:txBody>
-          <a:bodyPr wrap="square" lIns="0" tIns="0" rIns="0" bIns="0" rtlCol="0" anchor="t"/>
-          <a:lstStyle/>
-          <a:p>
-            <a:pPr algn="ctr" indent="0" marL="0">
-              <a:buNone/>
-            </a:pPr>
-            <a:r>
-              <a:rPr lang="en-US" sz="1400" dirty="0">
-                <a:solidFill>
-                  <a:schemeClr val="tx2"/>
-                </a:solidFill>
-              </a:rPr>
-              <a:t>Plot the value and its slope; value the engineering team as a lump.</a:t>
-            </a:r>
-            <a:endParaRPr lang="en-US" sz="1400" dirty="0"/>
-          </a:p>
-        </p:txBody>
-      </p:sp>
-      <p:sp>
-        <p:nvSpPr>
-          <p:cNvPr id="24" name="Number"/>
-          <p:cNvSpPr/>
-          <p:nvPr/>
-        </p:nvSpPr>
-        <p:spPr>
-          <a:xfrm>
-            <a:off x="10259294" y="2606040"/>
-            <a:ext cx="548640" cy="548640"/>
-          </a:xfrm>
-          <a:prstGeom prst="ellipse">
-            <a:avLst/>
-          </a:prstGeom>
-          <a:solidFill>
-            <a:schemeClr val="accent1"/>
-          </a:solidFill>
-          <a:ln w="6350">
-            <a:solidFill>
-              <a:schemeClr val="accent1"/>
-            </a:solidFill>
-            <a:prstDash val="solid"/>
-          </a:ln>
-        </p:spPr>
-      </p:sp>
-      <p:sp>
-        <p:nvSpPr>
-          <p:cNvPr id="25" name="Text 21"/>
-          <p:cNvSpPr txBox="1"/>
-          <p:nvPr/>
-        </p:nvSpPr>
-        <p:spPr>
-          <a:xfrm>
-            <a:off x="10259294" y="2606040"/>
-            <a:ext cx="548640" cy="548640"/>
-          </a:xfrm>
-          <a:prstGeom prst="rect">
-            <a:avLst/>
-          </a:prstGeom>
-          <a:noFill/>
-          <a:ln/>
-        </p:spPr>
-        <p:txBody>
-          <a:bodyPr wrap="square" lIns="0" tIns="0" rIns="0" bIns="0" rtlCol="0" anchor="ctr"/>
-          <a:lstStyle/>
-          <a:p>
-            <a:pPr algn="ctr" indent="0" marL="0">
-              <a:buNone/>
-            </a:pPr>
-            <a:r>
-              <a:rPr lang="en-US" sz="1600" b="1" dirty="0">
-                <a:solidFill>
-                  <a:schemeClr val="bg1"/>
-                </a:solidFill>
-                <a:latin typeface="Calibri" pitchFamily="34" charset="0"/>
-                <a:ea typeface="Calibri" pitchFamily="34" charset="-122"/>
-                <a:cs typeface="Calibri" pitchFamily="34" charset="-120"/>
-              </a:rPr>
-              <a:t>5</a:t>
-            </a:r>
-            <a:endParaRPr lang="en-US" sz="1600" dirty="0"/>
-          </a:p>
-        </p:txBody>
-      </p:sp>
-      <p:sp>
-        <p:nvSpPr>
-          <p:cNvPr id="26" name="Flow head"/>
-          <p:cNvSpPr txBox="1"/>
-          <p:nvPr/>
-        </p:nvSpPr>
-        <p:spPr>
-          <a:xfrm>
-            <a:off x="9497324" y="3291840"/>
-            <a:ext cx="2072579" cy="548640"/>
-          </a:xfrm>
-          <a:prstGeom prst="rect">
-            <a:avLst/>
-          </a:prstGeom>
-          <a:noFill/>
-          <a:ln/>
-        </p:spPr>
-        <p:txBody>
-          <a:bodyPr wrap="square" lIns="0" tIns="0" rIns="0" bIns="0" rtlCol="0" anchor="t"/>
-          <a:lstStyle/>
-          <a:p>
-            <a:pPr algn="ctr" indent="0" marL="0">
-              <a:buNone/>
-            </a:pPr>
-            <a:r>
-              <a:rPr lang="en-US" sz="1600" b="1" dirty="0">
-                <a:solidFill>
-                  <a:schemeClr val="tx1"/>
-                </a:solidFill>
-                <a:latin typeface="Cambria" pitchFamily="34" charset="0"/>
-                <a:ea typeface="Cambria" pitchFamily="34" charset="-122"/>
-                <a:cs typeface="Cambria" pitchFamily="34" charset="-120"/>
-              </a:rPr>
-              <a:t>Approximate and shrink the period</a:t>
-            </a:r>
-            <a:endParaRPr lang="en-US" sz="1600" dirty="0"/>
-          </a:p>
-        </p:txBody>
-      </p:sp>
-      <p:sp>
-        <p:nvSpPr>
-          <p:cNvPr id="27" name="Flow text"/>
-          <p:cNvSpPr txBox="1"/>
-          <p:nvPr/>
-        </p:nvSpPr>
-        <p:spPr>
-          <a:xfrm>
-            <a:off x="9515612" y="3867912"/>
-            <a:ext cx="2036003" cy="1554480"/>
-          </a:xfrm>
-          <a:prstGeom prst="rect">
-            <a:avLst/>
-          </a:prstGeom>
-          <a:noFill/>
-          <a:ln/>
-        </p:spPr>
-        <p:txBody>
-          <a:bodyPr wrap="square" lIns="0" tIns="0" rIns="0" bIns="0" rtlCol="0" anchor="t"/>
-          <a:lstStyle/>
-          <a:p>
-            <a:pPr algn="ctr" indent="0" marL="0">
-              <a:buNone/>
-            </a:pPr>
-            <a:r>
-              <a:rPr lang="en-US" sz="1400" dirty="0">
-                <a:solidFill>
-                  <a:schemeClr val="tx2"/>
-                </a:solidFill>
-              </a:rPr>
-              <a:t>Test a coarse grid and a smooth fit against their bounds; shorten the period and compare with Chapter 6.</a:t>
-            </a:r>
-            <a:endParaRPr lang="en-US" sz="1400" dirty="0"/>
-          </a:p>
-        </p:txBody>
-      </p:sp>
-      <p:sp>
-        <p:nvSpPr>
-          <p:cNvPr id="28" name="Deliverable card"/>
-          <p:cNvSpPr/>
-          <p:nvPr/>
-        </p:nvSpPr>
-        <p:spPr>
-          <a:xfrm>
-            <a:off x="548640" y="5486400"/>
-            <a:ext cx="11094415" cy="685800"/>
+            <a:off x="548640" y="1691640"/>
+            <a:ext cx="3515258" cy="2103120"/>
           </a:xfrm>
           <a:prstGeom prst="roundRect">
             <a:avLst>
-              <a:gd name="adj" fmla="val 10667"/>
+              <a:gd name="adj" fmla="val 3478"/>
             </a:avLst>
           </a:prstGeom>
           <a:solidFill>
@@ -14389,14 +13705,14 @@
       </p:sp>
       <p:sp>
         <p:nvSpPr>
-          <p:cNvPr id="29" name="Deliverable"/>
+          <p:cNvPr id="6" name="Card label"/>
           <p:cNvSpPr txBox="1"/>
           <p:nvPr/>
         </p:nvSpPr>
         <p:spPr>
           <a:xfrm>
-            <a:off x="777240" y="5559552"/>
-            <a:ext cx="10637215" cy="539496"/>
+            <a:off x="731520" y="1819656"/>
+            <a:ext cx="3149498" cy="310896"/>
           </a:xfrm>
           <a:prstGeom prst="rect">
             <a:avLst/>
@@ -14412,22 +13728,779 @@
               <a:buNone/>
             </a:pPr>
             <a:r>
-              <a:rPr lang="en-US" sz="1400" b="1" dirty="0">
+              <a:rPr lang="en-US" sz="1300" b="1" dirty="0">
+                <a:solidFill>
+                  <a:schemeClr val="accent1"/>
+                </a:solidFill>
+              </a:rPr>
+              <a:t>The decision</a:t>
+            </a:r>
+            <a:endParaRPr lang="en-US" sz="1300" dirty="0"/>
+          </a:p>
+        </p:txBody>
+      </p:sp>
+      <p:sp>
+        <p:nvSpPr>
+          <p:cNvPr id="7" name="Card head"/>
+          <p:cNvSpPr txBox="1"/>
+          <p:nvPr/>
+        </p:nvSpPr>
+        <p:spPr>
+          <a:xfrm>
+            <a:off x="731520" y="2148840"/>
+            <a:ext cx="3149498" cy="576072"/>
+          </a:xfrm>
+          <a:prstGeom prst="rect">
+            <a:avLst/>
+          </a:prstGeom>
+          <a:noFill/>
+          <a:ln/>
+        </p:spPr>
+        <p:txBody>
+          <a:bodyPr wrap="square" lIns="0" tIns="0" rIns="0" bIns="0" rtlCol="0" anchor="t"/>
+          <a:lstStyle/>
+          <a:p>
+            <a:pPr indent="0" marL="0">
+              <a:buNone/>
+            </a:pPr>
+            <a:r>
+              <a:rPr lang="en-US" sz="1600" b="1" dirty="0">
                 <a:solidFill>
                   <a:schemeClr val="tx1"/>
                 </a:solidFill>
-              </a:rPr>
-              <a:t>Deliverable:</a:t>
-            </a:r>
-            <a:r>
-              <a:rPr lang="en-US" sz="1400" dirty="0">
+                <a:latin typeface="Cambria" pitchFamily="34" charset="0"/>
+                <a:ea typeface="Cambria" pitchFamily="34" charset="-122"/>
+                <a:cs typeface="Cambria" pitchFamily="34" charset="-120"/>
+              </a:rPr>
+              <a:t>Which booking, at which fare</a:t>
+            </a:r>
+            <a:endParaRPr lang="en-US" sz="1600" dirty="0"/>
+          </a:p>
+        </p:txBody>
+      </p:sp>
+      <p:sp>
+        <p:nvSpPr>
+          <p:cNvPr id="8" name="Card text"/>
+          <p:cNvSpPr txBox="1"/>
+          <p:nvPr/>
+        </p:nvSpPr>
+        <p:spPr>
+          <a:xfrm>
+            <a:off x="731520" y="2798064"/>
+            <a:ext cx="3149498" cy="868680"/>
+          </a:xfrm>
+          <a:prstGeom prst="rect">
+            <a:avLst/>
+          </a:prstGeom>
+          <a:noFill/>
+          <a:ln/>
+        </p:spPr>
+        <p:txBody>
+          <a:bodyPr wrap="square" lIns="0" tIns="0" rIns="0" bIns="0" rtlCol="0" anchor="t"/>
+          <a:lstStyle/>
+          <a:p>
+            <a:pPr indent="0" marL="0">
+              <a:buNone/>
+            </a:pPr>
+            <a:r>
+              <a:rPr lang="en-US" sz="1300" dirty="0">
+                <a:solidFill>
+                  <a:schemeClr val="tx2"/>
+                </a:solidFill>
+              </a:rPr>
+              <a:t>On every flight, with no-shows to allow for and full-fare passengers still to come.</a:t>
+            </a:r>
+            <a:endParaRPr lang="en-US" sz="1300" dirty="0"/>
+          </a:p>
+        </p:txBody>
+      </p:sp>
+      <p:sp>
+        <p:nvSpPr>
+          <p:cNvPr id="9" name="Card"/>
+          <p:cNvSpPr/>
+          <p:nvPr/>
+        </p:nvSpPr>
+        <p:spPr>
+          <a:xfrm>
+            <a:off x="4338218" y="1691640"/>
+            <a:ext cx="3515258" cy="2103120"/>
+          </a:xfrm>
+          <a:prstGeom prst="roundRect">
+            <a:avLst>
+              <a:gd name="adj" fmla="val 3478"/>
+            </a:avLst>
+          </a:prstGeom>
+          <a:solidFill>
+            <a:schemeClr val="bg2"/>
+          </a:solidFill>
+          <a:ln w="9525">
+            <a:solidFill>
+              <a:srgbClr val="C4CBD8"/>
+            </a:solidFill>
+            <a:prstDash val="solid"/>
+          </a:ln>
+        </p:spPr>
+      </p:sp>
+      <p:sp>
+        <p:nvSpPr>
+          <p:cNvPr id="10" name="Card label"/>
+          <p:cNvSpPr txBox="1"/>
+          <p:nvPr/>
+        </p:nvSpPr>
+        <p:spPr>
+          <a:xfrm>
+            <a:off x="4521098" y="1819656"/>
+            <a:ext cx="3149498" cy="310896"/>
+          </a:xfrm>
+          <a:prstGeom prst="rect">
+            <a:avLst/>
+          </a:prstGeom>
+          <a:noFill/>
+          <a:ln/>
+        </p:spPr>
+        <p:txBody>
+          <a:bodyPr wrap="square" lIns="0" tIns="0" rIns="0" bIns="0" rtlCol="0" anchor="ctr"/>
+          <a:lstStyle/>
+          <a:p>
+            <a:pPr indent="0" marL="0">
+              <a:buNone/>
+            </a:pPr>
+            <a:r>
+              <a:rPr lang="en-US" sz="1300" b="1" dirty="0">
+                <a:solidFill>
+                  <a:schemeClr val="accent1"/>
+                </a:solidFill>
+              </a:rPr>
+              <a:t>The method</a:t>
+            </a:r>
+            <a:endParaRPr lang="en-US" sz="1300" dirty="0"/>
+          </a:p>
+        </p:txBody>
+      </p:sp>
+      <p:sp>
+        <p:nvSpPr>
+          <p:cNvPr id="11" name="Card head"/>
+          <p:cNvSpPr txBox="1"/>
+          <p:nvPr/>
+        </p:nvSpPr>
+        <p:spPr>
+          <a:xfrm>
+            <a:off x="4521098" y="2148840"/>
+            <a:ext cx="3149498" cy="576072"/>
+          </a:xfrm>
+          <a:prstGeom prst="rect">
+            <a:avLst/>
+          </a:prstGeom>
+          <a:noFill/>
+          <a:ln/>
+        </p:spPr>
+        <p:txBody>
+          <a:bodyPr wrap="square" lIns="0" tIns="0" rIns="0" bIns="0" rtlCol="0" anchor="t"/>
+          <a:lstStyle/>
+          <a:p>
+            <a:pPr indent="0" marL="0">
+              <a:buNone/>
+            </a:pPr>
+            <a:r>
+              <a:rPr lang="en-US" sz="1600" b="1" dirty="0">
                 <a:solidFill>
                   <a:schemeClr val="tx1"/>
                 </a:solidFill>
-              </a:rPr>
-              <a:t> a one-page note to the board with the rule, its margin and its cost, the comparison with Volume I's budget and with Chapter 6's answer, and the declarations the rule depends on. About 75 minutes.</a:t>
-            </a:r>
-            <a:endParaRPr lang="en-US" sz="1400" dirty="0"/>
+                <a:latin typeface="Cambria" pitchFamily="34" charset="0"/>
+                <a:ea typeface="Cambria" pitchFamily="34" charset="-122"/>
+                <a:cs typeface="Cambria" pitchFamily="34" charset="-120"/>
+              </a:rPr>
+              <a:t>Value a seat by position</a:t>
+            </a:r>
+            <a:endParaRPr lang="en-US" sz="1600" dirty="0"/>
+          </a:p>
+        </p:txBody>
+      </p:sp>
+      <p:sp>
+        <p:nvSpPr>
+          <p:cNvPr id="12" name="Card text"/>
+          <p:cNvSpPr txBox="1"/>
+          <p:nvPr/>
+        </p:nvSpPr>
+        <p:spPr>
+          <a:xfrm>
+            <a:off x="4521098" y="2798064"/>
+            <a:ext cx="3149498" cy="868680"/>
+          </a:xfrm>
+          <a:prstGeom prst="rect">
+            <a:avLst/>
+          </a:prstGeom>
+          <a:noFill/>
+          <a:ln/>
+        </p:spPr>
+        <p:txBody>
+          <a:bodyPr wrap="square" lIns="0" tIns="0" rIns="0" bIns="0" rtlCol="0" anchor="t"/>
+          <a:lstStyle/>
+          <a:p>
+            <a:pPr indent="0" marL="0">
+              <a:buNone/>
+            </a:pPr>
+            <a:r>
+              <a:rPr lang="en-US" sz="1300" dirty="0">
+                <a:solidFill>
+                  <a:schemeClr val="tx2"/>
+                </a:solidFill>
+              </a:rPr>
+              <a:t>Accept a fare only if it covers the seat's value; protection levels; Littlewood's rule.</a:t>
+            </a:r>
+            <a:endParaRPr lang="en-US" sz="1300" dirty="0"/>
+          </a:p>
+        </p:txBody>
+      </p:sp>
+      <p:sp>
+        <p:nvSpPr>
+          <p:cNvPr id="13" name="Card"/>
+          <p:cNvSpPr/>
+          <p:nvPr/>
+        </p:nvSpPr>
+        <p:spPr>
+          <a:xfrm>
+            <a:off x="8127797" y="1691640"/>
+            <a:ext cx="3515258" cy="2103120"/>
+          </a:xfrm>
+          <a:prstGeom prst="roundRect">
+            <a:avLst>
+              <a:gd name="adj" fmla="val 3478"/>
+            </a:avLst>
+          </a:prstGeom>
+          <a:solidFill>
+            <a:schemeClr val="tx1"/>
+          </a:solidFill>
+          <a:ln w="9525">
+            <a:solidFill>
+              <a:srgbClr val="0F1E3D"/>
+            </a:solidFill>
+            <a:prstDash val="solid"/>
+          </a:ln>
+        </p:spPr>
+      </p:sp>
+      <p:sp>
+        <p:nvSpPr>
+          <p:cNvPr id="14" name="Card label"/>
+          <p:cNvSpPr txBox="1"/>
+          <p:nvPr/>
+        </p:nvSpPr>
+        <p:spPr>
+          <a:xfrm>
+            <a:off x="8310677" y="1819656"/>
+            <a:ext cx="3149498" cy="310896"/>
+          </a:xfrm>
+          <a:prstGeom prst="rect">
+            <a:avLst/>
+          </a:prstGeom>
+          <a:noFill/>
+          <a:ln/>
+        </p:spPr>
+        <p:txBody>
+          <a:bodyPr wrap="square" lIns="0" tIns="0" rIns="0" bIns="0" rtlCol="0" anchor="ctr"/>
+          <a:lstStyle/>
+          <a:p>
+            <a:pPr indent="0" marL="0">
+              <a:buNone/>
+            </a:pPr>
+            <a:r>
+              <a:rPr lang="en-US" sz="1300" b="1" dirty="0">
+                <a:solidFill>
+                  <a:schemeClr val="accent1"/>
+                </a:solidFill>
+              </a:rPr>
+              <a:t>The result</a:t>
+            </a:r>
+            <a:endParaRPr lang="en-US" sz="1300" dirty="0"/>
+          </a:p>
+        </p:txBody>
+      </p:sp>
+      <p:sp>
+        <p:nvSpPr>
+          <p:cNvPr id="15" name="Card head"/>
+          <p:cNvSpPr txBox="1"/>
+          <p:nvPr/>
+        </p:nvSpPr>
+        <p:spPr>
+          <a:xfrm>
+            <a:off x="8310677" y="2148840"/>
+            <a:ext cx="3149498" cy="576072"/>
+          </a:xfrm>
+          <a:prstGeom prst="rect">
+            <a:avLst/>
+          </a:prstGeom>
+          <a:noFill/>
+          <a:ln/>
+        </p:spPr>
+        <p:txBody>
+          <a:bodyPr wrap="square" lIns="0" tIns="0" rIns="0" bIns="0" rtlCol="0" anchor="t"/>
+          <a:lstStyle/>
+          <a:p>
+            <a:pPr indent="0" marL="0">
+              <a:buNone/>
+            </a:pPr>
+            <a:r>
+              <a:rPr lang="en-US" sz="1600" b="1" dirty="0">
+                <a:solidFill>
+                  <a:schemeClr val="bg1"/>
+                </a:solidFill>
+                <a:latin typeface="Cambria" pitchFamily="34" charset="0"/>
+                <a:ea typeface="Cambria" pitchFamily="34" charset="-122"/>
+                <a:cs typeface="Cambria" pitchFamily="34" charset="-120"/>
+              </a:rPr>
+              <a:t>$1.4bn over three years</a:t>
+            </a:r>
+            <a:endParaRPr lang="en-US" sz="1600" dirty="0"/>
+          </a:p>
+        </p:txBody>
+      </p:sp>
+      <p:sp>
+        <p:nvSpPr>
+          <p:cNvPr id="16" name="Card text"/>
+          <p:cNvSpPr txBox="1"/>
+          <p:nvPr/>
+        </p:nvSpPr>
+        <p:spPr>
+          <a:xfrm>
+            <a:off x="8310677" y="2798064"/>
+            <a:ext cx="3149498" cy="868680"/>
+          </a:xfrm>
+          <a:prstGeom prst="rect">
+            <a:avLst/>
+          </a:prstGeom>
+          <a:noFill/>
+          <a:ln/>
+        </p:spPr>
+        <p:txBody>
+          <a:bodyPr wrap="square" lIns="0" tIns="0" rIns="0" bIns="0" rtlCol="0" anchor="t"/>
+          <a:lstStyle/>
+          <a:p>
+            <a:pPr indent="0" marL="0">
+              <a:buNone/>
+            </a:pPr>
+            <a:r>
+              <a:rPr lang="en-US" sz="1300" dirty="0">
+                <a:solidFill>
+                  <a:schemeClr val="bg2"/>
+                </a:solidFill>
+              </a:rPr>
+              <a:t>American's quantifiable benefit, with over $500m a year expected; the 1991 Franz Edelman Award.</a:t>
+            </a:r>
+            <a:endParaRPr lang="en-US" sz="1300" dirty="0"/>
+          </a:p>
+        </p:txBody>
+      </p:sp>
+      <p:sp>
+        <p:nvSpPr>
+          <p:cNvPr id="17" name="Card"/>
+          <p:cNvSpPr/>
+          <p:nvPr/>
+        </p:nvSpPr>
+        <p:spPr>
+          <a:xfrm>
+            <a:off x="548640" y="4069080"/>
+            <a:ext cx="3515258" cy="2103120"/>
+          </a:xfrm>
+          <a:prstGeom prst="roundRect">
+            <a:avLst>
+              <a:gd name="adj" fmla="val 3478"/>
+            </a:avLst>
+          </a:prstGeom>
+          <a:solidFill>
+            <a:schemeClr val="bg2"/>
+          </a:solidFill>
+          <a:ln w="9525">
+            <a:solidFill>
+              <a:srgbClr val="C4CBD8"/>
+            </a:solidFill>
+            <a:prstDash val="solid"/>
+          </a:ln>
+        </p:spPr>
+      </p:sp>
+      <p:sp>
+        <p:nvSpPr>
+          <p:cNvPr id="18" name="Card label"/>
+          <p:cNvSpPr txBox="1"/>
+          <p:nvPr/>
+        </p:nvSpPr>
+        <p:spPr>
+          <a:xfrm>
+            <a:off x="731520" y="4197096"/>
+            <a:ext cx="3149498" cy="310896"/>
+          </a:xfrm>
+          <a:prstGeom prst="rect">
+            <a:avLst/>
+          </a:prstGeom>
+          <a:noFill/>
+          <a:ln/>
+        </p:spPr>
+        <p:txBody>
+          <a:bodyPr wrap="square" lIns="0" tIns="0" rIns="0" bIns="0" rtlCol="0" anchor="ctr"/>
+          <a:lstStyle/>
+          <a:p>
+            <a:pPr indent="0" marL="0">
+              <a:buNone/>
+            </a:pPr>
+            <a:r>
+              <a:rPr lang="en-US" sz="1300" b="1" dirty="0">
+                <a:solidFill>
+                  <a:schemeClr val="accent1"/>
+                </a:solidFill>
+              </a:rPr>
+              <a:t>Making it work</a:t>
+            </a:r>
+            <a:endParaRPr lang="en-US" sz="1300" dirty="0"/>
+          </a:p>
+        </p:txBody>
+      </p:sp>
+      <p:sp>
+        <p:nvSpPr>
+          <p:cNvPr id="19" name="Card head"/>
+          <p:cNvSpPr txBox="1"/>
+          <p:nvPr/>
+        </p:nvSpPr>
+        <p:spPr>
+          <a:xfrm>
+            <a:off x="731520" y="4526280"/>
+            <a:ext cx="3149498" cy="576072"/>
+          </a:xfrm>
+          <a:prstGeom prst="rect">
+            <a:avLst/>
+          </a:prstGeom>
+          <a:noFill/>
+          <a:ln/>
+        </p:spPr>
+        <p:txBody>
+          <a:bodyPr wrap="square" lIns="0" tIns="0" rIns="0" bIns="0" rtlCol="0" anchor="t"/>
+          <a:lstStyle/>
+          <a:p>
+            <a:pPr indent="0" marL="0">
+              <a:buNone/>
+            </a:pPr>
+            <a:r>
+              <a:rPr lang="en-US" sz="1600" b="1" dirty="0">
+                <a:solidFill>
+                  <a:schemeClr val="tx1"/>
+                </a:solidFill>
+                <a:latin typeface="Cambria" pitchFamily="34" charset="0"/>
+                <a:ea typeface="Cambria" pitchFamily="34" charset="-122"/>
+                <a:cs typeface="Cambria" pitchFamily="34" charset="-120"/>
+              </a:rPr>
+              <a:t>Systems and a champion</a:t>
+            </a:r>
+            <a:endParaRPr lang="en-US" sz="1600" dirty="0"/>
+          </a:p>
+        </p:txBody>
+      </p:sp>
+      <p:sp>
+        <p:nvSpPr>
+          <p:cNvPr id="20" name="Card text"/>
+          <p:cNvSpPr txBox="1"/>
+          <p:nvPr/>
+        </p:nvSpPr>
+        <p:spPr>
+          <a:xfrm>
+            <a:off x="731520" y="5175504"/>
+            <a:ext cx="3149498" cy="868680"/>
+          </a:xfrm>
+          <a:prstGeom prst="rect">
+            <a:avLst/>
+          </a:prstGeom>
+          <a:noFill/>
+          <a:ln/>
+        </p:spPr>
+        <p:txBody>
+          <a:bodyPr wrap="square" lIns="0" tIns="0" rIns="0" bIns="0" rtlCol="0" anchor="t"/>
+          <a:lstStyle/>
+          <a:p>
+            <a:pPr indent="0" marL="0">
+              <a:buNone/>
+            </a:pPr>
+            <a:r>
+              <a:rPr lang="en-US" sz="1300" dirty="0">
+                <a:solidFill>
+                  <a:schemeClr val="tx2"/>
+                </a:solidFill>
+              </a:rPr>
+              <a:t>SABRE put bookings in one place; the group grew from 13 people to about 700, with Crandall as its champion.</a:t>
+            </a:r>
+            <a:endParaRPr lang="en-US" sz="1300" dirty="0"/>
+          </a:p>
+        </p:txBody>
+      </p:sp>
+      <p:sp>
+        <p:nvSpPr>
+          <p:cNvPr id="21" name="Card"/>
+          <p:cNvSpPr/>
+          <p:nvPr/>
+        </p:nvSpPr>
+        <p:spPr>
+          <a:xfrm>
+            <a:off x="4338218" y="4069080"/>
+            <a:ext cx="3515258" cy="2103120"/>
+          </a:xfrm>
+          <a:prstGeom prst="roundRect">
+            <a:avLst>
+              <a:gd name="adj" fmla="val 3478"/>
+            </a:avLst>
+          </a:prstGeom>
+          <a:solidFill>
+            <a:schemeClr val="bg2"/>
+          </a:solidFill>
+          <a:ln w="9525">
+            <a:solidFill>
+              <a:srgbClr val="C4CBD8"/>
+            </a:solidFill>
+            <a:prstDash val="solid"/>
+          </a:ln>
+        </p:spPr>
+      </p:sp>
+      <p:sp>
+        <p:nvSpPr>
+          <p:cNvPr id="22" name="Card label"/>
+          <p:cNvSpPr txBox="1"/>
+          <p:nvPr/>
+        </p:nvSpPr>
+        <p:spPr>
+          <a:xfrm>
+            <a:off x="4521098" y="4197096"/>
+            <a:ext cx="3149498" cy="310896"/>
+          </a:xfrm>
+          <a:prstGeom prst="rect">
+            <a:avLst/>
+          </a:prstGeom>
+          <a:noFill/>
+          <a:ln/>
+        </p:spPr>
+        <p:txBody>
+          <a:bodyPr wrap="square" lIns="0" tIns="0" rIns="0" bIns="0" rtlCol="0" anchor="ctr"/>
+          <a:lstStyle/>
+          <a:p>
+            <a:pPr indent="0" marL="0">
+              <a:buNone/>
+            </a:pPr>
+            <a:r>
+              <a:rPr lang="en-US" sz="1300" b="1" dirty="0">
+                <a:solidFill>
+                  <a:schemeClr val="accent1"/>
+                </a:solidFill>
+              </a:rPr>
+              <a:t>What Meridian takes</a:t>
+            </a:r>
+            <a:endParaRPr lang="en-US" sz="1300" dirty="0"/>
+          </a:p>
+        </p:txBody>
+      </p:sp>
+      <p:sp>
+        <p:nvSpPr>
+          <p:cNvPr id="23" name="Card head"/>
+          <p:cNvSpPr txBox="1"/>
+          <p:nvPr/>
+        </p:nvSpPr>
+        <p:spPr>
+          <a:xfrm>
+            <a:off x="4521098" y="4526280"/>
+            <a:ext cx="3149498" cy="576072"/>
+          </a:xfrm>
+          <a:prstGeom prst="rect">
+            <a:avLst/>
+          </a:prstGeom>
+          <a:noFill/>
+          <a:ln/>
+        </p:spPr>
+        <p:txBody>
+          <a:bodyPr wrap="square" lIns="0" tIns="0" rIns="0" bIns="0" rtlCol="0" anchor="t"/>
+          <a:lstStyle/>
+          <a:p>
+            <a:pPr indent="0" marL="0">
+              <a:buNone/>
+            </a:pPr>
+            <a:r>
+              <a:rPr lang="en-US" sz="1600" b="1" dirty="0">
+                <a:solidFill>
+                  <a:schemeClr val="tx1"/>
+                </a:solidFill>
+                <a:latin typeface="Cambria" pitchFamily="34" charset="0"/>
+                <a:ea typeface="Cambria" pitchFamily="34" charset="-122"/>
+                <a:cs typeface="Cambria" pitchFamily="34" charset="-120"/>
+              </a:rPr>
+              <a:t>A margin by a critical ratio</a:t>
+            </a:r>
+            <a:endParaRPr lang="en-US" sz="1600" dirty="0"/>
+          </a:p>
+        </p:txBody>
+      </p:sp>
+      <p:sp>
+        <p:nvSpPr>
+          <p:cNvPr id="24" name="Card text"/>
+          <p:cNvSpPr txBox="1"/>
+          <p:nvPr/>
+        </p:nvSpPr>
+        <p:spPr>
+          <a:xfrm>
+            <a:off x="4521098" y="5175504"/>
+            <a:ext cx="3149498" cy="868680"/>
+          </a:xfrm>
+          <a:prstGeom prst="rect">
+            <a:avLst/>
+          </a:prstGeom>
+          <a:noFill/>
+          <a:ln/>
+        </p:spPr>
+        <p:txBody>
+          <a:bodyPr wrap="square" lIns="0" tIns="0" rIns="0" bIns="0" rtlCol="0" anchor="t"/>
+          <a:lstStyle/>
+          <a:p>
+            <a:pPr indent="0" marL="0">
+              <a:buNone/>
+            </a:pPr>
+            <a:r>
+              <a:rPr lang="en-US" sz="1300" dirty="0">
+                <a:solidFill>
+                  <a:schemeClr val="tx2"/>
+                </a:solidFill>
+              </a:rPr>
+              <a:t>Worked Example 7.1's capability margin is the airline's protection level.</a:t>
+            </a:r>
+            <a:endParaRPr lang="en-US" sz="1300" dirty="0"/>
+          </a:p>
+        </p:txBody>
+      </p:sp>
+      <p:sp>
+        <p:nvSpPr>
+          <p:cNvPr id="25" name="Card"/>
+          <p:cNvSpPr/>
+          <p:nvPr/>
+        </p:nvSpPr>
+        <p:spPr>
+          <a:xfrm>
+            <a:off x="8127797" y="4069080"/>
+            <a:ext cx="3515258" cy="2103120"/>
+          </a:xfrm>
+          <a:prstGeom prst="roundRect">
+            <a:avLst>
+              <a:gd name="adj" fmla="val 3478"/>
+            </a:avLst>
+          </a:prstGeom>
+          <a:solidFill>
+            <a:schemeClr val="bg2"/>
+          </a:solidFill>
+          <a:ln w="9525">
+            <a:solidFill>
+              <a:srgbClr val="C4CBD8"/>
+            </a:solidFill>
+            <a:prstDash val="solid"/>
+          </a:ln>
+        </p:spPr>
+      </p:sp>
+      <p:sp>
+        <p:nvSpPr>
+          <p:cNvPr id="26" name="Card label"/>
+          <p:cNvSpPr txBox="1"/>
+          <p:nvPr/>
+        </p:nvSpPr>
+        <p:spPr>
+          <a:xfrm>
+            <a:off x="8310677" y="4197096"/>
+            <a:ext cx="3149498" cy="310896"/>
+          </a:xfrm>
+          <a:prstGeom prst="rect">
+            <a:avLst/>
+          </a:prstGeom>
+          <a:noFill/>
+          <a:ln/>
+        </p:spPr>
+        <p:txBody>
+          <a:bodyPr wrap="square" lIns="0" tIns="0" rIns="0" bIns="0" rtlCol="0" anchor="ctr"/>
+          <a:lstStyle/>
+          <a:p>
+            <a:pPr indent="0" marL="0">
+              <a:buNone/>
+            </a:pPr>
+            <a:r>
+              <a:rPr lang="en-US" sz="1300" b="1" dirty="0">
+                <a:solidFill>
+                  <a:schemeClr val="accent1"/>
+                </a:solidFill>
+              </a:rPr>
+              <a:t>For the board</a:t>
+            </a:r>
+            <a:endParaRPr lang="en-US" sz="1300" dirty="0"/>
+          </a:p>
+        </p:txBody>
+      </p:sp>
+      <p:sp>
+        <p:nvSpPr>
+          <p:cNvPr id="27" name="Card head"/>
+          <p:cNvSpPr txBox="1"/>
+          <p:nvPr/>
+        </p:nvSpPr>
+        <p:spPr>
+          <a:xfrm>
+            <a:off x="8310677" y="4526280"/>
+            <a:ext cx="3149498" cy="576072"/>
+          </a:xfrm>
+          <a:prstGeom prst="rect">
+            <a:avLst/>
+          </a:prstGeom>
+          <a:noFill/>
+          <a:ln/>
+        </p:spPr>
+        <p:txBody>
+          <a:bodyPr wrap="square" lIns="0" tIns="0" rIns="0" bIns="0" rtlCol="0" anchor="t"/>
+          <a:lstStyle/>
+          <a:p>
+            <a:pPr indent="0" marL="0">
+              <a:buNone/>
+            </a:pPr>
+            <a:r>
+              <a:rPr lang="en-US" sz="1600" b="1" dirty="0">
+                <a:solidFill>
+                  <a:schemeClr val="tx1"/>
+                </a:solidFill>
+                <a:latin typeface="Cambria" pitchFamily="34" charset="0"/>
+                <a:ea typeface="Cambria" pitchFamily="34" charset="-122"/>
+                <a:cs typeface="Cambria" pitchFamily="34" charset="-120"/>
+              </a:rPr>
+              <a:t>Do customers understand our rules?</a:t>
+            </a:r>
+            <a:endParaRPr lang="en-US" sz="1600" dirty="0"/>
+          </a:p>
+        </p:txBody>
+      </p:sp>
+      <p:sp>
+        <p:nvSpPr>
+          <p:cNvPr id="28" name="Card text"/>
+          <p:cNvSpPr txBox="1"/>
+          <p:nvPr/>
+        </p:nvSpPr>
+        <p:spPr>
+          <a:xfrm>
+            <a:off x="8310677" y="5175504"/>
+            <a:ext cx="3149498" cy="868680"/>
+          </a:xfrm>
+          <a:prstGeom prst="rect">
+            <a:avLst/>
+          </a:prstGeom>
+          <a:noFill/>
+          <a:ln/>
+        </p:spPr>
+        <p:txBody>
+          <a:bodyPr wrap="square" lIns="0" tIns="0" rIns="0" bIns="0" rtlCol="0" anchor="t"/>
+          <a:lstStyle/>
+          <a:p>
+            <a:pPr indent="0" marL="0">
+              <a:buNone/>
+            </a:pPr>
+            <a:r>
+              <a:rPr lang="en-US" sz="1300" dirty="0">
+                <a:solidFill>
+                  <a:schemeClr val="tx2"/>
+                </a:solidFill>
+              </a:rPr>
+              <a:t>By 1992, 94 percent of travelers bought discount tickets with cumbersome rules.</a:t>
+            </a:r>
+            <a:endParaRPr lang="en-US" sz="1300" dirty="0"/>
           </a:p>
         </p:txBody>
       </p:sp>
@@ -14533,7 +14606,7 @@
                   <a:schemeClr val="accent1"/>
                 </a:solidFill>
               </a:rPr>
-              <a:t>KEY TAKEAWAYS</a:t>
+              <a:t>AXIOM LAB 2.7 · MODULE AXIOM-07</a:t>
             </a:r>
             <a:endParaRPr lang="en-US" sz="1200" dirty="0"/>
           </a:p>
@@ -14574,22 +14647,105 @@
                 <a:ea typeface="Cambria" pitchFamily="34" charset="-122"/>
                 <a:cs typeface="Cambria" pitchFamily="34" charset="-120"/>
               </a:rPr>
-              <a:t>What to carry forward</a:t>
+              <a:t>Valuing every position, in AXIOM</a:t>
             </a:r>
             <a:endParaRPr lang="en-US" sz="3200" dirty="0"/>
           </a:p>
         </p:txBody>
       </p:sp>
-      <p:sp>
-        <p:nvSpPr>
-          <p:cNvPr id="5" name="Number"/>
+      <p:pic>
+        <p:nvPicPr>
+          <p:cNvPr id="5" name="AXIOM logo" descr="AXIOM">    </p:cNvPr>
+          <p:cNvPicPr>
+            <a:picLocks noChangeAspect="1"/>
+          </p:cNvPicPr>
+          <p:nvPr/>
+        </p:nvPicPr>
+        <p:blipFill>
+          <a:blip r:embed="rId1"/>
+          <a:stretch>
+            <a:fillRect/>
+          </a:stretch>
+        </p:blipFill>
+        <p:spPr>
+          <a:xfrm>
+            <a:off x="9539935" y="310896"/>
+            <a:ext cx="2103120" cy="420624"/>
+          </a:xfrm>
+          <a:prstGeom prst="rect">
+            <a:avLst/>
+          </a:prstGeom>
+        </p:spPr>
+      </p:pic>
+      <p:sp>
+        <p:nvSpPr>
+          <p:cNvPr id="6" name="Situation"/>
+          <p:cNvSpPr txBox="1"/>
+          <p:nvPr/>
+        </p:nvSpPr>
+        <p:spPr>
+          <a:xfrm>
+            <a:off x="548640" y="1645920"/>
+            <a:ext cx="11094415" cy="777240"/>
+          </a:xfrm>
+          <a:prstGeom prst="rect">
+            <a:avLst/>
+          </a:prstGeom>
+          <a:noFill/>
+          <a:ln/>
+        </p:spPr>
+        <p:txBody>
+          <a:bodyPr wrap="square" lIns="0" tIns="0" rIns="0" bIns="0" rtlCol="0" anchor="t"/>
+          <a:lstStyle/>
+          <a:p>
+            <a:pPr indent="0" marL="0">
+              <a:buNone/>
+            </a:pPr>
+            <a:r>
+              <a:rPr lang="en-US" sz="1500" dirty="0">
+                <a:solidFill>
+                  <a:schemeClr val="tx1"/>
+                </a:solidFill>
+              </a:rPr>
+              <a:t>The board has accepted Chapter 6's advice to stop defending 58. Capability does not move as planned, and the chief human resources officer must propose a hiring rule with a margin over the floor. Open AXIOM, choose Lab 2.7 and load the Meridian capability instance with the engineering office's record.</a:t>
+            </a:r>
+            <a:endParaRPr lang="en-US" sz="1500" dirty="0"/>
+          </a:p>
+        </p:txBody>
+      </p:sp>
+      <p:sp>
+        <p:nvSpPr>
+          <p:cNvPr id="7" name="Flow line"/>
           <p:cNvSpPr/>
           <p:nvPr/>
         </p:nvSpPr>
         <p:spPr>
           <a:xfrm>
-            <a:off x="548640" y="1737360"/>
-            <a:ext cx="566928" cy="566928"/>
+            <a:off x="1658082" y="2880360"/>
+            <a:ext cx="8875532" cy="0"/>
+          </a:xfrm>
+          <a:prstGeom prst="line">
+            <a:avLst/>
+          </a:prstGeom>
+          <a:noFill/>
+          <a:ln w="25400">
+            <a:solidFill>
+              <a:srgbClr val="C4CBD8"/>
+            </a:solidFill>
+            <a:prstDash val="solid"/>
+          </a:ln>
+        </p:spPr>
+      </p:sp>
+      <p:sp>
+        <p:nvSpPr>
+          <p:cNvPr id="8" name="Number"/>
+          <p:cNvSpPr/>
+          <p:nvPr/>
+        </p:nvSpPr>
+        <p:spPr>
+          <a:xfrm>
+            <a:off x="1383762" y="2606040"/>
+            <a:ext cx="548640" cy="548640"/>
           </a:xfrm>
           <a:prstGeom prst="ellipse">
             <a:avLst/>
@@ -14607,14 +14763,14 @@
       </p:sp>
       <p:sp>
         <p:nvSpPr>
-          <p:cNvPr id="6" name="Text 3"/>
+          <p:cNvPr id="9" name="Text 5"/>
           <p:cNvSpPr txBox="1"/>
           <p:nvPr/>
         </p:nvSpPr>
         <p:spPr>
           <a:xfrm>
-            <a:off x="548640" y="1737360"/>
-            <a:ext cx="566928" cy="566928"/>
+            <a:off x="1383762" y="2606040"/>
+            <a:ext cx="548640" cy="548640"/>
           </a:xfrm>
           <a:prstGeom prst="rect">
             <a:avLst/>
@@ -14630,7 +14786,7 @@
               <a:buNone/>
             </a:pPr>
             <a:r>
-              <a:rPr lang="en-US" sz="1500" b="1" dirty="0">
+              <a:rPr lang="en-US" sz="1600" b="1" dirty="0">
                 <a:solidFill>
                   <a:schemeClr val="bg1"/>
                 </a:solidFill>
@@ -14640,56 +14796,95 @@
               </a:rPr>
               <a:t>1</a:t>
             </a:r>
-            <a:endParaRPr lang="en-US" sz="1500" dirty="0"/>
-          </a:p>
-        </p:txBody>
-      </p:sp>
-      <p:sp>
-        <p:nvSpPr>
-          <p:cNvPr id="7" name="Row text"/>
+            <a:endParaRPr lang="en-US" sz="1600" dirty="0"/>
+          </a:p>
+        </p:txBody>
+      </p:sp>
+      <p:sp>
+        <p:nvSpPr>
+          <p:cNvPr id="10" name="Flow head"/>
           <p:cNvSpPr txBox="1"/>
           <p:nvPr/>
         </p:nvSpPr>
         <p:spPr>
           <a:xfrm>
-            <a:off x="1325880" y="1691640"/>
-            <a:ext cx="10317175" cy="841248"/>
-          </a:xfrm>
-          <a:prstGeom prst="rect">
-            <a:avLst/>
-          </a:prstGeom>
-          <a:noFill/>
-          <a:ln/>
-        </p:spPr>
-        <p:txBody>
-          <a:bodyPr wrap="square" lIns="0" tIns="0" rIns="0" bIns="0" rtlCol="0" anchor="ctr"/>
-          <a:lstStyle/>
-          <a:p>
-            <a:pPr indent="0" marL="0">
-              <a:buNone/>
-            </a:pPr>
-            <a:r>
-              <a:rPr lang="en-US" sz="1500" dirty="0">
+            <a:off x="621792" y="3291840"/>
+            <a:ext cx="2072579" cy="548640"/>
+          </a:xfrm>
+          <a:prstGeom prst="rect">
+            <a:avLst/>
+          </a:prstGeom>
+          <a:noFill/>
+          <a:ln/>
+        </p:spPr>
+        <p:txBody>
+          <a:bodyPr wrap="square" lIns="0" tIns="0" rIns="0" bIns="0" rtlCol="0" anchor="t"/>
+          <a:lstStyle/>
+          <a:p>
+            <a:pPr algn="ctr" indent="0" marL="0">
+              <a:buNone/>
+            </a:pPr>
+            <a:r>
+              <a:rPr lang="en-US" sz="1600" b="1" dirty="0">
                 <a:solidFill>
                   <a:schemeClr val="tx1"/>
                 </a:solidFill>
-              </a:rPr>
-              <a:t>Dynamic programming values every position, and its best decisions form a rule; when the future is uncertain, a rule can respond to what happens and a plan cannot.</a:t>
-            </a:r>
-            <a:endParaRPr lang="en-US" sz="1500" dirty="0"/>
-          </a:p>
-        </p:txBody>
-      </p:sp>
-      <p:sp>
-        <p:nvSpPr>
-          <p:cNvPr id="8" name="Number"/>
+                <a:latin typeface="Cambria" pitchFamily="34" charset="0"/>
+                <a:ea typeface="Cambria" pitchFamily="34" charset="-122"/>
+                <a:cs typeface="Cambria" pitchFamily="34" charset="-120"/>
+              </a:rPr>
+              <a:t>Look one quarter ahead</a:t>
+            </a:r>
+            <a:endParaRPr lang="en-US" sz="1600" dirty="0"/>
+          </a:p>
+        </p:txBody>
+      </p:sp>
+      <p:sp>
+        <p:nvSpPr>
+          <p:cNvPr id="11" name="Flow text"/>
+          <p:cNvSpPr txBox="1"/>
+          <p:nvPr/>
+        </p:nvSpPr>
+        <p:spPr>
+          <a:xfrm>
+            <a:off x="640080" y="3867912"/>
+            <a:ext cx="2036003" cy="1554480"/>
+          </a:xfrm>
+          <a:prstGeom prst="rect">
+            <a:avLst/>
+          </a:prstGeom>
+          <a:noFill/>
+          <a:ln/>
+        </p:spPr>
+        <p:txBody>
+          <a:bodyPr wrap="square" lIns="0" tIns="0" rIns="0" bIns="0" rtlCol="0" anchor="t"/>
+          <a:lstStyle/>
+          <a:p>
+            <a:pPr algn="ctr" indent="0" marL="0">
+              <a:buNone/>
+            </a:pPr>
+            <a:r>
+              <a:rPr lang="en-US" sz="1400" dirty="0">
+                <a:solidFill>
+                  <a:schemeClr val="tx2"/>
+                </a:solidFill>
+              </a:rPr>
+              <a:t>Plot the value of each hiring decision at a capability level and find the best.</a:t>
+            </a:r>
+            <a:endParaRPr lang="en-US" sz="1400" dirty="0"/>
+          </a:p>
+        </p:txBody>
+      </p:sp>
+      <p:sp>
+        <p:nvSpPr>
+          <p:cNvPr id="12" name="Number"/>
           <p:cNvSpPr/>
           <p:nvPr/>
         </p:nvSpPr>
         <p:spPr>
           <a:xfrm>
-            <a:off x="548640" y="2633472"/>
-            <a:ext cx="566928" cy="566928"/>
+            <a:off x="3602645" y="2606040"/>
+            <a:ext cx="548640" cy="548640"/>
           </a:xfrm>
           <a:prstGeom prst="ellipse">
             <a:avLst/>
@@ -14707,14 +14902,14 @@
       </p:sp>
       <p:sp>
         <p:nvSpPr>
-          <p:cNvPr id="9" name="Text 6"/>
+          <p:cNvPr id="13" name="Text 9"/>
           <p:cNvSpPr txBox="1"/>
           <p:nvPr/>
         </p:nvSpPr>
         <p:spPr>
           <a:xfrm>
-            <a:off x="548640" y="2633472"/>
-            <a:ext cx="566928" cy="566928"/>
+            <a:off x="3602645" y="2606040"/>
+            <a:ext cx="548640" cy="548640"/>
           </a:xfrm>
           <a:prstGeom prst="rect">
             <a:avLst/>
@@ -14730,7 +14925,7 @@
               <a:buNone/>
             </a:pPr>
             <a:r>
-              <a:rPr lang="en-US" sz="1500" b="1" dirty="0">
+              <a:rPr lang="en-US" sz="1600" b="1" dirty="0">
                 <a:solidFill>
                   <a:schemeClr val="bg1"/>
                 </a:solidFill>
@@ -14740,56 +14935,95 @@
               </a:rPr>
               <a:t>2</a:t>
             </a:r>
-            <a:endParaRPr lang="en-US" sz="1500" dirty="0"/>
-          </a:p>
-        </p:txBody>
-      </p:sp>
-      <p:sp>
-        <p:nvSpPr>
-          <p:cNvPr id="10" name="Row text"/>
+            <a:endParaRPr lang="en-US" sz="1600" dirty="0"/>
+          </a:p>
+        </p:txBody>
+      </p:sp>
+      <p:sp>
+        <p:nvSpPr>
+          <p:cNvPr id="14" name="Flow head"/>
           <p:cNvSpPr txBox="1"/>
           <p:nvPr/>
         </p:nvSpPr>
         <p:spPr>
           <a:xfrm>
-            <a:off x="1325880" y="2587752"/>
-            <a:ext cx="10317175" cy="841248"/>
-          </a:xfrm>
-          <a:prstGeom prst="rect">
-            <a:avLst/>
-          </a:prstGeom>
-          <a:noFill/>
-          <a:ln/>
-        </p:spPr>
-        <p:txBody>
-          <a:bodyPr wrap="square" lIns="0" tIns="0" rIns="0" bIns="0" rtlCol="0" anchor="ctr"/>
-          <a:lstStyle/>
-          <a:p>
-            <a:pPr indent="0" marL="0">
-              <a:buNone/>
-            </a:pPr>
-            <a:r>
-              <a:rPr lang="en-US" sz="1500" dirty="0">
+            <a:off x="2840675" y="3291840"/>
+            <a:ext cx="2072579" cy="548640"/>
+          </a:xfrm>
+          <a:prstGeom prst="rect">
+            <a:avLst/>
+          </a:prstGeom>
+          <a:noFill/>
+          <a:ln/>
+        </p:spPr>
+        <p:txBody>
+          <a:bodyPr wrap="square" lIns="0" tIns="0" rIns="0" bIns="0" rtlCol="0" anchor="t"/>
+          <a:lstStyle/>
+          <a:p>
+            <a:pPr algn="ctr" indent="0" marL="0">
+              <a:buNone/>
+            </a:pPr>
+            <a:r>
+              <a:rPr lang="en-US" sz="1600" b="1" dirty="0">
                 <a:solidFill>
                   <a:schemeClr val="tx1"/>
                 </a:solidFill>
-              </a:rPr>
-              <a:t>The value function solves the Bellman equation: the value of a position is the best a decision can earn now plus the discounted expected value of where it leads. Over an open horizon the Bellman operator is a contraction, and a rule is best exactly when it is greedy for the value function.</a:t>
-            </a:r>
-            <a:endParaRPr lang="en-US" sz="1500" dirty="0"/>
-          </a:p>
-        </p:txBody>
-      </p:sp>
-      <p:sp>
-        <p:nvSpPr>
-          <p:cNvPr id="11" name="Number"/>
+                <a:latin typeface="Cambria" pitchFamily="34" charset="0"/>
+                <a:ea typeface="Cambria" pitchFamily="34" charset="-122"/>
+                <a:cs typeface="Cambria" pitchFamily="34" charset="-120"/>
+              </a:rPr>
+              <a:t>Solve backward</a:t>
+            </a:r>
+            <a:endParaRPr lang="en-US" sz="1600" dirty="0"/>
+          </a:p>
+        </p:txBody>
+      </p:sp>
+      <p:sp>
+        <p:nvSpPr>
+          <p:cNvPr id="15" name="Flow text"/>
+          <p:cNvSpPr txBox="1"/>
+          <p:nvPr/>
+        </p:nvSpPr>
+        <p:spPr>
+          <a:xfrm>
+            <a:off x="2858963" y="3867912"/>
+            <a:ext cx="2036003" cy="1554480"/>
+          </a:xfrm>
+          <a:prstGeom prst="rect">
+            <a:avLst/>
+          </a:prstGeom>
+          <a:noFill/>
+          <a:ln/>
+        </p:spPr>
+        <p:txBody>
+          <a:bodyPr wrap="square" lIns="0" tIns="0" rIns="0" bIns="0" rtlCol="0" anchor="t"/>
+          <a:lstStyle/>
+          <a:p>
+            <a:pPr algn="ctr" indent="0" marL="0">
+              <a:buNone/>
+            </a:pPr>
+            <a:r>
+              <a:rPr lang="en-US" sz="1400" dirty="0">
+                <a:solidFill>
+                  <a:schemeClr val="tx2"/>
+                </a:solidFill>
+              </a:rPr>
+              <a:t>Solve a twelve-quarter horizon by backward induction and read the rule table.</a:t>
+            </a:r>
+            <a:endParaRPr lang="en-US" sz="1400" dirty="0"/>
+          </a:p>
+        </p:txBody>
+      </p:sp>
+      <p:sp>
+        <p:nvSpPr>
+          <p:cNvPr id="16" name="Number"/>
           <p:cNvSpPr/>
           <p:nvPr/>
         </p:nvSpPr>
         <p:spPr>
           <a:xfrm>
-            <a:off x="548640" y="3529584"/>
-            <a:ext cx="566928" cy="566928"/>
+            <a:off x="5821528" y="2606040"/>
+            <a:ext cx="548640" cy="548640"/>
           </a:xfrm>
           <a:prstGeom prst="ellipse">
             <a:avLst/>
@@ -14807,14 +15041,14 @@
       </p:sp>
       <p:sp>
         <p:nvSpPr>
-          <p:cNvPr id="12" name="Text 9"/>
+          <p:cNvPr id="17" name="Text 13"/>
           <p:cNvSpPr txBox="1"/>
           <p:nvPr/>
         </p:nvSpPr>
         <p:spPr>
           <a:xfrm>
-            <a:off x="548640" y="3529584"/>
-            <a:ext cx="566928" cy="566928"/>
+            <a:off x="5821528" y="2606040"/>
+            <a:ext cx="548640" cy="548640"/>
           </a:xfrm>
           <a:prstGeom prst="rect">
             <a:avLst/>
@@ -14830,7 +15064,7 @@
               <a:buNone/>
             </a:pPr>
             <a:r>
-              <a:rPr lang="en-US" sz="1500" b="1" dirty="0">
+              <a:rPr lang="en-US" sz="1600" b="1" dirty="0">
                 <a:solidFill>
                   <a:schemeClr val="bg1"/>
                 </a:solidFill>
@@ -14840,56 +15074,95 @@
               </a:rPr>
               <a:t>3</a:t>
             </a:r>
-            <a:endParaRPr lang="en-US" sz="1500" dirty="0"/>
-          </a:p>
-        </p:txBody>
-      </p:sp>
-      <p:sp>
-        <p:nvSpPr>
-          <p:cNvPr id="13" name="Row text"/>
+            <a:endParaRPr lang="en-US" sz="1600" dirty="0"/>
+          </a:p>
+        </p:txBody>
+      </p:sp>
+      <p:sp>
+        <p:nvSpPr>
+          <p:cNvPr id="18" name="Flow head"/>
           <p:cNvSpPr txBox="1"/>
           <p:nvPr/>
         </p:nvSpPr>
         <p:spPr>
           <a:xfrm>
-            <a:off x="1325880" y="3483864"/>
-            <a:ext cx="10317175" cy="841248"/>
-          </a:xfrm>
-          <a:prstGeom prst="rect">
-            <a:avLst/>
-          </a:prstGeom>
-          <a:noFill/>
-          <a:ln/>
-        </p:spPr>
-        <p:txBody>
-          <a:bodyPr wrap="square" lIns="0" tIns="0" rIns="0" bIns="0" rtlCol="0" anchor="ctr"/>
-          <a:lstStyle/>
-          <a:p>
-            <a:pPr indent="0" marL="0">
-              <a:buNone/>
-            </a:pPr>
-            <a:r>
-              <a:rPr lang="en-US" sz="1500" dirty="0">
+            <a:off x="5059558" y="3291840"/>
+            <a:ext cx="2072579" cy="548640"/>
+          </a:xfrm>
+          <a:prstGeom prst="rect">
+            <a:avLst/>
+          </a:prstGeom>
+          <a:noFill/>
+          <a:ln/>
+        </p:spPr>
+        <p:txBody>
+          <a:bodyPr wrap="square" lIns="0" tIns="0" rIns="0" bIns="0" rtlCol="0" anchor="t"/>
+          <a:lstStyle/>
+          <a:p>
+            <a:pPr algn="ctr" indent="0" marL="0">
+              <a:buNone/>
+            </a:pPr>
+            <a:r>
+              <a:rPr lang="en-US" sz="1600" b="1" dirty="0">
                 <a:solidFill>
                   <a:schemeClr val="tx1"/>
                 </a:solidFill>
-              </a:rPr>
-              <a:t>Differences of the value function value lumps; its slopes price stocks and satisfy the price recursion, Chapter 6's costate equation on a calendar, averaged over events.</a:t>
-            </a:r>
-            <a:endParaRPr lang="en-US" sz="1500" dirty="0"/>
-          </a:p>
-        </p:txBody>
-      </p:sp>
-      <p:sp>
-        <p:nvSpPr>
-          <p:cNvPr id="14" name="Number"/>
+                <a:latin typeface="Cambria" pitchFamily="34" charset="0"/>
+                <a:ea typeface="Cambria" pitchFamily="34" charset="-122"/>
+                <a:cs typeface="Cambria" pitchFamily="34" charset="-120"/>
+              </a:rPr>
+              <a:t>Iterate</a:t>
+            </a:r>
+            <a:endParaRPr lang="en-US" sz="1600" dirty="0"/>
+          </a:p>
+        </p:txBody>
+      </p:sp>
+      <p:sp>
+        <p:nvSpPr>
+          <p:cNvPr id="19" name="Flow text"/>
+          <p:cNvSpPr txBox="1"/>
+          <p:nvPr/>
+        </p:nvSpPr>
+        <p:spPr>
+          <a:xfrm>
+            <a:off x="5077846" y="3867912"/>
+            <a:ext cx="2036003" cy="1554480"/>
+          </a:xfrm>
+          <a:prstGeom prst="rect">
+            <a:avLst/>
+          </a:prstGeom>
+          <a:noFill/>
+          <a:ln/>
+        </p:spPr>
+        <p:txBody>
+          <a:bodyPr wrap="square" lIns="0" tIns="0" rIns="0" bIns="0" rtlCol="0" anchor="t"/>
+          <a:lstStyle/>
+          <a:p>
+            <a:pPr algn="ctr" indent="0" marL="0">
+              <a:buNone/>
+            </a:pPr>
+            <a:r>
+              <a:rPr lang="en-US" sz="1400" dirty="0">
+                <a:solidFill>
+                  <a:schemeClr val="tx2"/>
+                </a:solidFill>
+              </a:rPr>
+              <a:t>Value iteration with its stopping bound, then policy iteration from Volume I's rule.</a:t>
+            </a:r>
+            <a:endParaRPr lang="en-US" sz="1400" dirty="0"/>
+          </a:p>
+        </p:txBody>
+      </p:sp>
+      <p:sp>
+        <p:nvSpPr>
+          <p:cNvPr id="20" name="Number"/>
           <p:cNvSpPr/>
           <p:nvPr/>
         </p:nvSpPr>
         <p:spPr>
           <a:xfrm>
-            <a:off x="548640" y="4425696"/>
-            <a:ext cx="566928" cy="566928"/>
+            <a:off x="8040411" y="2606040"/>
+            <a:ext cx="548640" cy="548640"/>
           </a:xfrm>
           <a:prstGeom prst="ellipse">
             <a:avLst/>
@@ -14907,14 +15180,14 @@
       </p:sp>
       <p:sp>
         <p:nvSpPr>
-          <p:cNvPr id="15" name="Text 12"/>
+          <p:cNvPr id="21" name="Text 17"/>
           <p:cNvSpPr txBox="1"/>
           <p:nvPr/>
         </p:nvSpPr>
         <p:spPr>
           <a:xfrm>
-            <a:off x="548640" y="4425696"/>
-            <a:ext cx="566928" cy="566928"/>
+            <a:off x="8040411" y="2606040"/>
+            <a:ext cx="548640" cy="548640"/>
           </a:xfrm>
           <a:prstGeom prst="rect">
             <a:avLst/>
@@ -14930,7 +15203,7 @@
               <a:buNone/>
             </a:pPr>
             <a:r>
-              <a:rPr lang="en-US" sz="1500" b="1" dirty="0">
+              <a:rPr lang="en-US" sz="1600" b="1" dirty="0">
                 <a:solidFill>
                   <a:schemeClr val="bg1"/>
                 </a:solidFill>
@@ -14940,56 +15213,95 @@
               </a:rPr>
               <a:t>4</a:t>
             </a:r>
-            <a:endParaRPr lang="en-US" sz="1500" dirty="0"/>
-          </a:p>
-        </p:txBody>
-      </p:sp>
-      <p:sp>
-        <p:nvSpPr>
-          <p:cNvPr id="16" name="Row text"/>
+            <a:endParaRPr lang="en-US" sz="1600" dirty="0"/>
+          </a:p>
+        </p:txBody>
+      </p:sp>
+      <p:sp>
+        <p:nvSpPr>
+          <p:cNvPr id="22" name="Flow head"/>
           <p:cNvSpPr txBox="1"/>
           <p:nvPr/>
         </p:nvSpPr>
         <p:spPr>
           <a:xfrm>
-            <a:off x="1325880" y="4379976"/>
-            <a:ext cx="10317175" cy="841248"/>
-          </a:xfrm>
-          <a:prstGeom prst="rect">
-            <a:avLst/>
-          </a:prstGeom>
-          <a:noFill/>
-          <a:ln/>
-        </p:spPr>
-        <p:txBody>
-          <a:bodyPr wrap="square" lIns="0" tIns="0" rIns="0" bIns="0" rtlCol="0" anchor="ctr"/>
-          <a:lstStyle/>
-          <a:p>
-            <a:pPr indent="0" marL="0">
-              <a:buNone/>
-            </a:pPr>
-            <a:r>
-              <a:rPr lang="en-US" sz="1500" dirty="0">
+            <a:off x="7278441" y="3291840"/>
+            <a:ext cx="2072579" cy="548640"/>
+          </a:xfrm>
+          <a:prstGeom prst="rect">
+            <a:avLst/>
+          </a:prstGeom>
+          <a:noFill/>
+          <a:ln/>
+        </p:spPr>
+        <p:txBody>
+          <a:bodyPr wrap="square" lIns="0" tIns="0" rIns="0" bIns="0" rtlCol="0" anchor="t"/>
+          <a:lstStyle/>
+          <a:p>
+            <a:pPr algn="ctr" indent="0" marL="0">
+              <a:buNone/>
+            </a:pPr>
+            <a:r>
+              <a:rPr lang="en-US" sz="1600" b="1" dirty="0">
                 <a:solidFill>
                   <a:schemeClr val="tx1"/>
                 </a:solidFill>
-              </a:rPr>
-              <a:t>Best rules take simple shapes: thresholds for yes-or-no decisions, and targets for maintained stocks, with a margin set by the critical ratio. The best rule is at least as good as re-planning, which is at least as good as the best plan; the gap between rule and plan is the value of information.</a:t>
-            </a:r>
-            <a:endParaRPr lang="en-US" sz="1500" dirty="0"/>
-          </a:p>
-        </p:txBody>
-      </p:sp>
-      <p:sp>
-        <p:nvSpPr>
-          <p:cNvPr id="17" name="Number"/>
+                <a:latin typeface="Cambria" pitchFamily="34" charset="0"/>
+                <a:ea typeface="Cambria" pitchFamily="34" charset="-122"/>
+                <a:cs typeface="Cambria" pitchFamily="34" charset="-120"/>
+              </a:rPr>
+              <a:t>Read values and prices</a:t>
+            </a:r>
+            <a:endParaRPr lang="en-US" sz="1600" dirty="0"/>
+          </a:p>
+        </p:txBody>
+      </p:sp>
+      <p:sp>
+        <p:nvSpPr>
+          <p:cNvPr id="23" name="Flow text"/>
+          <p:cNvSpPr txBox="1"/>
+          <p:nvPr/>
+        </p:nvSpPr>
+        <p:spPr>
+          <a:xfrm>
+            <a:off x="7296729" y="3867912"/>
+            <a:ext cx="2036003" cy="1554480"/>
+          </a:xfrm>
+          <a:prstGeom prst="rect">
+            <a:avLst/>
+          </a:prstGeom>
+          <a:noFill/>
+          <a:ln/>
+        </p:spPr>
+        <p:txBody>
+          <a:bodyPr wrap="square" lIns="0" tIns="0" rIns="0" bIns="0" rtlCol="0" anchor="t"/>
+          <a:lstStyle/>
+          <a:p>
+            <a:pPr algn="ctr" indent="0" marL="0">
+              <a:buNone/>
+            </a:pPr>
+            <a:r>
+              <a:rPr lang="en-US" sz="1400" dirty="0">
+                <a:solidFill>
+                  <a:schemeClr val="tx2"/>
+                </a:solidFill>
+              </a:rPr>
+              <a:t>Plot the value and its slope; value the engineering team as a lump.</a:t>
+            </a:r>
+            <a:endParaRPr lang="en-US" sz="1400" dirty="0"/>
+          </a:p>
+        </p:txBody>
+      </p:sp>
+      <p:sp>
+        <p:nvSpPr>
+          <p:cNvPr id="24" name="Number"/>
           <p:cNvSpPr/>
           <p:nvPr/>
         </p:nvSpPr>
         <p:spPr>
           <a:xfrm>
-            <a:off x="548640" y="5321808"/>
-            <a:ext cx="566928" cy="566928"/>
+            <a:off x="10259294" y="2606040"/>
+            <a:ext cx="548640" cy="548640"/>
           </a:xfrm>
           <a:prstGeom prst="ellipse">
             <a:avLst/>
@@ -15007,14 +15319,14 @@
       </p:sp>
       <p:sp>
         <p:nvSpPr>
-          <p:cNvPr id="18" name="Text 15"/>
+          <p:cNvPr id="25" name="Text 21"/>
           <p:cNvSpPr txBox="1"/>
           <p:nvPr/>
         </p:nvSpPr>
         <p:spPr>
           <a:xfrm>
-            <a:off x="548640" y="5321808"/>
-            <a:ext cx="566928" cy="566928"/>
+            <a:off x="10259294" y="2606040"/>
+            <a:ext cx="548640" cy="548640"/>
           </a:xfrm>
           <a:prstGeom prst="rect">
             <a:avLst/>
@@ -15030,7 +15342,7 @@
               <a:buNone/>
             </a:pPr>
             <a:r>
-              <a:rPr lang="en-US" sz="1500" b="1" dirty="0">
+              <a:rPr lang="en-US" sz="1600" b="1" dirty="0">
                 <a:solidFill>
                   <a:schemeClr val="bg1"/>
                 </a:solidFill>
@@ -15040,20 +15352,122 @@
               </a:rPr>
               <a:t>5</a:t>
             </a:r>
-            <a:endParaRPr lang="en-US" sz="1500" dirty="0"/>
-          </a:p>
-        </p:txBody>
-      </p:sp>
-      <p:sp>
-        <p:nvSpPr>
-          <p:cNvPr id="19" name="Row text"/>
+            <a:endParaRPr lang="en-US" sz="1600" dirty="0"/>
+          </a:p>
+        </p:txBody>
+      </p:sp>
+      <p:sp>
+        <p:nvSpPr>
+          <p:cNvPr id="26" name="Flow head"/>
           <p:cNvSpPr txBox="1"/>
           <p:nvPr/>
         </p:nvSpPr>
         <p:spPr>
           <a:xfrm>
-            <a:off x="1325880" y="5276088"/>
-            <a:ext cx="10317175" cy="841248"/>
+            <a:off x="9497324" y="3291840"/>
+            <a:ext cx="2072579" cy="548640"/>
+          </a:xfrm>
+          <a:prstGeom prst="rect">
+            <a:avLst/>
+          </a:prstGeom>
+          <a:noFill/>
+          <a:ln/>
+        </p:spPr>
+        <p:txBody>
+          <a:bodyPr wrap="square" lIns="0" tIns="0" rIns="0" bIns="0" rtlCol="0" anchor="t"/>
+          <a:lstStyle/>
+          <a:p>
+            <a:pPr algn="ctr" indent="0" marL="0">
+              <a:buNone/>
+            </a:pPr>
+            <a:r>
+              <a:rPr lang="en-US" sz="1600" b="1" dirty="0">
+                <a:solidFill>
+                  <a:schemeClr val="tx1"/>
+                </a:solidFill>
+                <a:latin typeface="Cambria" pitchFamily="34" charset="0"/>
+                <a:ea typeface="Cambria" pitchFamily="34" charset="-122"/>
+                <a:cs typeface="Cambria" pitchFamily="34" charset="-120"/>
+              </a:rPr>
+              <a:t>Approximate and shrink the period</a:t>
+            </a:r>
+            <a:endParaRPr lang="en-US" sz="1600" dirty="0"/>
+          </a:p>
+        </p:txBody>
+      </p:sp>
+      <p:sp>
+        <p:nvSpPr>
+          <p:cNvPr id="27" name="Flow text"/>
+          <p:cNvSpPr txBox="1"/>
+          <p:nvPr/>
+        </p:nvSpPr>
+        <p:spPr>
+          <a:xfrm>
+            <a:off x="9515612" y="3867912"/>
+            <a:ext cx="2036003" cy="1554480"/>
+          </a:xfrm>
+          <a:prstGeom prst="rect">
+            <a:avLst/>
+          </a:prstGeom>
+          <a:noFill/>
+          <a:ln/>
+        </p:spPr>
+        <p:txBody>
+          <a:bodyPr wrap="square" lIns="0" tIns="0" rIns="0" bIns="0" rtlCol="0" anchor="t"/>
+          <a:lstStyle/>
+          <a:p>
+            <a:pPr algn="ctr" indent="0" marL="0">
+              <a:buNone/>
+            </a:pPr>
+            <a:r>
+              <a:rPr lang="en-US" sz="1400" dirty="0">
+                <a:solidFill>
+                  <a:schemeClr val="tx2"/>
+                </a:solidFill>
+              </a:rPr>
+              <a:t>Test a coarse grid and a smooth fit against their bounds; shorten the period and compare with Chapter 6.</a:t>
+            </a:r>
+            <a:endParaRPr lang="en-US" sz="1400" dirty="0"/>
+          </a:p>
+        </p:txBody>
+      </p:sp>
+      <p:sp>
+        <p:nvSpPr>
+          <p:cNvPr id="28" name="Deliverable card"/>
+          <p:cNvSpPr/>
+          <p:nvPr/>
+        </p:nvSpPr>
+        <p:spPr>
+          <a:xfrm>
+            <a:off x="548640" y="5486400"/>
+            <a:ext cx="11094415" cy="685800"/>
+          </a:xfrm>
+          <a:prstGeom prst="roundRect">
+            <a:avLst>
+              <a:gd name="adj" fmla="val 10667"/>
+            </a:avLst>
+          </a:prstGeom>
+          <a:solidFill>
+            <a:schemeClr val="bg2"/>
+          </a:solidFill>
+          <a:ln w="9525">
+            <a:solidFill>
+              <a:srgbClr val="C4CBD8"/>
+            </a:solidFill>
+            <a:prstDash val="solid"/>
+          </a:ln>
+        </p:spPr>
+      </p:sp>
+      <p:sp>
+        <p:nvSpPr>
+          <p:cNvPr id="29" name="Deliverable"/>
+          <p:cNvSpPr txBox="1"/>
+          <p:nvPr/>
+        </p:nvSpPr>
+        <p:spPr>
+          <a:xfrm>
+            <a:off x="777240" y="5559552"/>
+            <a:ext cx="10637215" cy="539496"/>
           </a:xfrm>
           <a:prstGeom prst="rect">
             <a:avLst/>
@@ -15069,14 +15483,22 @@
               <a:buNone/>
             </a:pPr>
             <a:r>
-              <a:rPr lang="en-US" sz="1500" dirty="0">
+              <a:rPr lang="en-US" sz="1400" b="1" dirty="0">
                 <a:solidFill>
                   <a:schemeClr val="tx1"/>
                 </a:solidFill>
               </a:rPr>
-              <a:t>Backward induction, value and policy iteration, and linear programming compute values and rules with error bounds that certify them; approximations scale to many stocks, with errors amplified by the effective horizon.</a:t>
-            </a:r>
-            <a:endParaRPr lang="en-US" sz="1500" dirty="0"/>
+              <a:t>Deliverable:</a:t>
+            </a:r>
+            <a:r>
+              <a:rPr lang="en-US" sz="1400" dirty="0">
+                <a:solidFill>
+                  <a:schemeClr val="tx1"/>
+                </a:solidFill>
+              </a:rPr>
+              <a:t> a one-page note to the board with the rule, its margin and its cost, the comparison with Volume I's budget and with Chapter 6's answer, and the declarations the rule depends on. About 75 minutes.</a:t>
+            </a:r>
+            <a:endParaRPr lang="en-US" sz="1400" dirty="0"/>
           </a:p>
         </p:txBody>
       </p:sp>
@@ -15182,7 +15604,7 @@
                   <a:schemeClr val="accent1"/>
                 </a:solidFill>
               </a:rPr>
-              <a:t>THIS WEEK'S LABORATORY</a:t>
+              <a:t>KEY TAKEAWAYS</a:t>
             </a:r>
             <a:endParaRPr lang="en-US" sz="1200" dirty="0"/>
           </a:p>
@@ -15223,7 +15645,7 @@
                 <a:ea typeface="Cambria" pitchFamily="34" charset="-122"/>
                 <a:cs typeface="Cambria" pitchFamily="34" charset="-120"/>
               </a:rPr>
-              <a:t>Notebook and workbook reproduce the book</a:t>
+              <a:t>What to carry forward</a:t>
             </a:r>
             <a:endParaRPr lang="en-US" sz="3200" dirty="0"/>
           </a:p>
@@ -15231,26 +15653,24 @@
       </p:sp>
       <p:sp>
         <p:nvSpPr>
-          <p:cNvPr id="5" name="Stat card"/>
+          <p:cNvPr id="5" name="Number"/>
           <p:cNvSpPr/>
           <p:nvPr/>
         </p:nvSpPr>
         <p:spPr>
           <a:xfrm>
-            <a:off x="548640" y="1691640"/>
-            <a:ext cx="2567864" cy="1691640"/>
-          </a:xfrm>
-          <a:prstGeom prst="roundRect">
-            <a:avLst>
-              <a:gd name="adj" fmla="val 4324"/>
-            </a:avLst>
+            <a:off x="548640" y="1737360"/>
+            <a:ext cx="566928" cy="566928"/>
+          </a:xfrm>
+          <a:prstGeom prst="ellipse">
+            <a:avLst/>
           </a:prstGeom>
           <a:solidFill>
-            <a:schemeClr val="tx1"/>
+            <a:schemeClr val="accent1"/>
           </a:solidFill>
-          <a:ln w="9525">
+          <a:ln w="6350">
             <a:solidFill>
-              <a:srgbClr val="0F1E3D"/>
+              <a:schemeClr val="accent1"/>
             </a:solidFill>
             <a:prstDash val="solid"/>
           </a:ln>
@@ -15258,14 +15678,14 @@
       </p:sp>
       <p:sp>
         <p:nvSpPr>
-          <p:cNvPr id="6" name="Stat value"/>
+          <p:cNvPr id="6" name="Text 3"/>
           <p:cNvSpPr txBox="1"/>
           <p:nvPr/>
         </p:nvSpPr>
         <p:spPr>
           <a:xfrm>
-            <a:off x="685800" y="1801368"/>
-            <a:ext cx="2293544" cy="914400"/>
+            <a:off x="548640" y="1737360"/>
+            <a:ext cx="566928" cy="566928"/>
           </a:xfrm>
           <a:prstGeom prst="rect">
             <a:avLst/>
@@ -15281,78 +15701,76 @@
               <a:buNone/>
             </a:pPr>
             <a:r>
-              <a:rPr lang="en-US" sz="4400" b="1" dirty="0">
-                <a:solidFill>
-                  <a:schemeClr val="accent1"/>
-                </a:solidFill>
-                <a:latin typeface="Cambria" pitchFamily="34" charset="0"/>
-                <a:ea typeface="Cambria" pitchFamily="34" charset="-122"/>
-                <a:cs typeface="Cambria" pitchFamily="34" charset="-120"/>
-              </a:rPr>
-              <a:t>25</a:t>
-            </a:r>
-            <a:endParaRPr lang="en-US" sz="4400" dirty="0"/>
-          </a:p>
-        </p:txBody>
-      </p:sp>
-      <p:sp>
-        <p:nvSpPr>
-          <p:cNvPr id="7" name="Stat label"/>
+              <a:rPr lang="en-US" sz="1500" b="1" dirty="0">
+                <a:solidFill>
+                  <a:schemeClr val="bg1"/>
+                </a:solidFill>
+                <a:latin typeface="Calibri" pitchFamily="34" charset="0"/>
+                <a:ea typeface="Calibri" pitchFamily="34" charset="-122"/>
+                <a:cs typeface="Calibri" pitchFamily="34" charset="-120"/>
+              </a:rPr>
+              <a:t>1</a:t>
+            </a:r>
+            <a:endParaRPr lang="en-US" sz="1500" dirty="0"/>
+          </a:p>
+        </p:txBody>
+      </p:sp>
+      <p:sp>
+        <p:nvSpPr>
+          <p:cNvPr id="7" name="Row text"/>
           <p:cNvSpPr txBox="1"/>
           <p:nvPr/>
         </p:nvSpPr>
         <p:spPr>
           <a:xfrm>
-            <a:off x="685800" y="2697480"/>
-            <a:ext cx="2293544" cy="612648"/>
-          </a:xfrm>
-          <a:prstGeom prst="rect">
-            <a:avLst/>
-          </a:prstGeom>
-          <a:noFill/>
-          <a:ln/>
-        </p:spPr>
-        <p:txBody>
-          <a:bodyPr wrap="square" lIns="0" tIns="0" rIns="0" bIns="0" rtlCol="0" anchor="t"/>
-          <a:lstStyle/>
-          <a:p>
-            <a:pPr algn="ctr" indent="0" marL="0">
-              <a:buNone/>
-            </a:pPr>
-            <a:r>
-              <a:rPr lang="en-US" sz="1400" dirty="0">
-                <a:solidFill>
-                  <a:schemeClr val="bg2"/>
-                </a:solidFill>
-              </a:rPr>
-              <a:t>notebook checkpoints, every one PASS</a:t>
-            </a:r>
-            <a:endParaRPr lang="en-US" sz="1400" dirty="0"/>
-          </a:p>
-        </p:txBody>
-      </p:sp>
-      <p:sp>
-        <p:nvSpPr>
-          <p:cNvPr id="8" name="Stat card"/>
+            <a:off x="1325880" y="1691640"/>
+            <a:ext cx="10317175" cy="841248"/>
+          </a:xfrm>
+          <a:prstGeom prst="rect">
+            <a:avLst/>
+          </a:prstGeom>
+          <a:noFill/>
+          <a:ln/>
+        </p:spPr>
+        <p:txBody>
+          <a:bodyPr wrap="square" lIns="0" tIns="0" rIns="0" bIns="0" rtlCol="0" anchor="ctr"/>
+          <a:lstStyle/>
+          <a:p>
+            <a:pPr indent="0" marL="0">
+              <a:buNone/>
+            </a:pPr>
+            <a:r>
+              <a:rPr lang="en-US" sz="1500" dirty="0">
+                <a:solidFill>
+                  <a:schemeClr val="tx1"/>
+                </a:solidFill>
+              </a:rPr>
+              <a:t>Dynamic programming values every position, and its best decisions form a rule; when the future is uncertain, a rule can respond to what happens and a plan cannot.</a:t>
+            </a:r>
+            <a:endParaRPr lang="en-US" sz="1500" dirty="0"/>
+          </a:p>
+        </p:txBody>
+      </p:sp>
+      <p:sp>
+        <p:nvSpPr>
+          <p:cNvPr id="8" name="Number"/>
           <p:cNvSpPr/>
           <p:nvPr/>
         </p:nvSpPr>
         <p:spPr>
           <a:xfrm>
-            <a:off x="3390824" y="1691640"/>
-            <a:ext cx="2567864" cy="1691640"/>
-          </a:xfrm>
-          <a:prstGeom prst="roundRect">
-            <a:avLst>
-              <a:gd name="adj" fmla="val 4324"/>
-            </a:avLst>
+            <a:off x="548640" y="2633472"/>
+            <a:ext cx="566928" cy="566928"/>
+          </a:xfrm>
+          <a:prstGeom prst="ellipse">
+            <a:avLst/>
           </a:prstGeom>
           <a:solidFill>
-            <a:schemeClr val="bg2"/>
+            <a:schemeClr val="accent1"/>
           </a:solidFill>
-          <a:ln w="9525">
+          <a:ln w="6350">
             <a:solidFill>
-              <a:srgbClr val="C4CBD8"/>
+              <a:schemeClr val="accent1"/>
             </a:solidFill>
             <a:prstDash val="solid"/>
           </a:ln>
@@ -15360,14 +15778,14 @@
       </p:sp>
       <p:sp>
         <p:nvSpPr>
-          <p:cNvPr id="9" name="Stat value"/>
+          <p:cNvPr id="9" name="Text 6"/>
           <p:cNvSpPr txBox="1"/>
           <p:nvPr/>
         </p:nvSpPr>
         <p:spPr>
           <a:xfrm>
-            <a:off x="3527984" y="1801368"/>
-            <a:ext cx="2293544" cy="914400"/>
+            <a:off x="548640" y="2633472"/>
+            <a:ext cx="566928" cy="566928"/>
           </a:xfrm>
           <a:prstGeom prst="rect">
             <a:avLst/>
@@ -15383,78 +15801,76 @@
               <a:buNone/>
             </a:pPr>
             <a:r>
-              <a:rPr lang="en-US" sz="4400" b="1" dirty="0">
+              <a:rPr lang="en-US" sz="1500" b="1" dirty="0">
+                <a:solidFill>
+                  <a:schemeClr val="bg1"/>
+                </a:solidFill>
+                <a:latin typeface="Calibri" pitchFamily="34" charset="0"/>
+                <a:ea typeface="Calibri" pitchFamily="34" charset="-122"/>
+                <a:cs typeface="Calibri" pitchFamily="34" charset="-120"/>
+              </a:rPr>
+              <a:t>2</a:t>
+            </a:r>
+            <a:endParaRPr lang="en-US" sz="1500" dirty="0"/>
+          </a:p>
+        </p:txBody>
+      </p:sp>
+      <p:sp>
+        <p:nvSpPr>
+          <p:cNvPr id="10" name="Row text"/>
+          <p:cNvSpPr txBox="1"/>
+          <p:nvPr/>
+        </p:nvSpPr>
+        <p:spPr>
+          <a:xfrm>
+            <a:off x="1325880" y="2587752"/>
+            <a:ext cx="10317175" cy="841248"/>
+          </a:xfrm>
+          <a:prstGeom prst="rect">
+            <a:avLst/>
+          </a:prstGeom>
+          <a:noFill/>
+          <a:ln/>
+        </p:spPr>
+        <p:txBody>
+          <a:bodyPr wrap="square" lIns="0" tIns="0" rIns="0" bIns="0" rtlCol="0" anchor="ctr"/>
+          <a:lstStyle/>
+          <a:p>
+            <a:pPr indent="0" marL="0">
+              <a:buNone/>
+            </a:pPr>
+            <a:r>
+              <a:rPr lang="en-US" sz="1500" dirty="0">
                 <a:solidFill>
                   <a:schemeClr val="tx1"/>
                 </a:solidFill>
-                <a:latin typeface="Cambria" pitchFamily="34" charset="0"/>
-                <a:ea typeface="Cambria" pitchFamily="34" charset="-122"/>
-                <a:cs typeface="Cambria" pitchFamily="34" charset="-120"/>
-              </a:rPr>
-              <a:t>26</a:t>
-            </a:r>
-            <a:endParaRPr lang="en-US" sz="4400" dirty="0"/>
-          </a:p>
-        </p:txBody>
-      </p:sp>
-      <p:sp>
-        <p:nvSpPr>
-          <p:cNvPr id="10" name="Stat label"/>
-          <p:cNvSpPr txBox="1"/>
-          <p:nvPr/>
-        </p:nvSpPr>
-        <p:spPr>
-          <a:xfrm>
-            <a:off x="3527984" y="2697480"/>
-            <a:ext cx="2293544" cy="612648"/>
-          </a:xfrm>
-          <a:prstGeom prst="rect">
-            <a:avLst/>
-          </a:prstGeom>
-          <a:noFill/>
-          <a:ln/>
-        </p:spPr>
-        <p:txBody>
-          <a:bodyPr wrap="square" lIns="0" tIns="0" rIns="0" bIns="0" rtlCol="0" anchor="t"/>
-          <a:lstStyle/>
-          <a:p>
-            <a:pPr algn="ctr" indent="0" marL="0">
-              <a:buNone/>
-            </a:pPr>
-            <a:r>
-              <a:rPr lang="en-US" sz="1400" dirty="0">
-                <a:solidFill>
-                  <a:schemeClr val="tx2"/>
-                </a:solidFill>
-              </a:rPr>
-              <a:t>workbook checks against the engine, ALL PASS</a:t>
-            </a:r>
-            <a:endParaRPr lang="en-US" sz="1400" dirty="0"/>
-          </a:p>
-        </p:txBody>
-      </p:sp>
-      <p:sp>
-        <p:nvSpPr>
-          <p:cNvPr id="11" name="Stat card"/>
+              </a:rPr>
+              <a:t>The value function solves the Bellman equation: the value of a position is the best a decision can earn now plus the discounted expected value of where it leads. Over an open horizon the Bellman operator is a contraction, and a rule is best exactly when it is greedy for the value function.</a:t>
+            </a:r>
+            <a:endParaRPr lang="en-US" sz="1500" dirty="0"/>
+          </a:p>
+        </p:txBody>
+      </p:sp>
+      <p:sp>
+        <p:nvSpPr>
+          <p:cNvPr id="11" name="Number"/>
           <p:cNvSpPr/>
           <p:nvPr/>
         </p:nvSpPr>
         <p:spPr>
           <a:xfrm>
-            <a:off x="6233008" y="1691640"/>
-            <a:ext cx="2567864" cy="1691640"/>
-          </a:xfrm>
-          <a:prstGeom prst="roundRect">
-            <a:avLst>
-              <a:gd name="adj" fmla="val 4324"/>
-            </a:avLst>
+            <a:off x="548640" y="3529584"/>
+            <a:ext cx="566928" cy="566928"/>
+          </a:xfrm>
+          <a:prstGeom prst="ellipse">
+            <a:avLst/>
           </a:prstGeom>
           <a:solidFill>
-            <a:schemeClr val="bg2"/>
+            <a:schemeClr val="accent1"/>
           </a:solidFill>
-          <a:ln w="9525">
+          <a:ln w="6350">
             <a:solidFill>
-              <a:srgbClr val="C4CBD8"/>
+              <a:schemeClr val="accent1"/>
             </a:solidFill>
             <a:prstDash val="solid"/>
           </a:ln>
@@ -15462,14 +15878,14 @@
       </p:sp>
       <p:sp>
         <p:nvSpPr>
-          <p:cNvPr id="12" name="Stat value"/>
+          <p:cNvPr id="12" name="Text 9"/>
           <p:cNvSpPr txBox="1"/>
           <p:nvPr/>
         </p:nvSpPr>
         <p:spPr>
           <a:xfrm>
-            <a:off x="6370168" y="1801368"/>
-            <a:ext cx="2293544" cy="914400"/>
+            <a:off x="548640" y="3529584"/>
+            <a:ext cx="566928" cy="566928"/>
           </a:xfrm>
           <a:prstGeom prst="rect">
             <a:avLst/>
@@ -15485,78 +15901,76 @@
               <a:buNone/>
             </a:pPr>
             <a:r>
-              <a:rPr lang="en-US" sz="4400" b="1" dirty="0">
+              <a:rPr lang="en-US" sz="1500" b="1" dirty="0">
+                <a:solidFill>
+                  <a:schemeClr val="bg1"/>
+                </a:solidFill>
+                <a:latin typeface="Calibri" pitchFamily="34" charset="0"/>
+                <a:ea typeface="Calibri" pitchFamily="34" charset="-122"/>
+                <a:cs typeface="Calibri" pitchFamily="34" charset="-120"/>
+              </a:rPr>
+              <a:t>3</a:t>
+            </a:r>
+            <a:endParaRPr lang="en-US" sz="1500" dirty="0"/>
+          </a:p>
+        </p:txBody>
+      </p:sp>
+      <p:sp>
+        <p:nvSpPr>
+          <p:cNvPr id="13" name="Row text"/>
+          <p:cNvSpPr txBox="1"/>
+          <p:nvPr/>
+        </p:nvSpPr>
+        <p:spPr>
+          <a:xfrm>
+            <a:off x="1325880" y="3483864"/>
+            <a:ext cx="10317175" cy="841248"/>
+          </a:xfrm>
+          <a:prstGeom prst="rect">
+            <a:avLst/>
+          </a:prstGeom>
+          <a:noFill/>
+          <a:ln/>
+        </p:spPr>
+        <p:txBody>
+          <a:bodyPr wrap="square" lIns="0" tIns="0" rIns="0" bIns="0" rtlCol="0" anchor="ctr"/>
+          <a:lstStyle/>
+          <a:p>
+            <a:pPr indent="0" marL="0">
+              <a:buNone/>
+            </a:pPr>
+            <a:r>
+              <a:rPr lang="en-US" sz="1500" dirty="0">
                 <a:solidFill>
                   <a:schemeClr val="tx1"/>
                 </a:solidFill>
-                <a:latin typeface="Cambria" pitchFamily="34" charset="0"/>
-                <a:ea typeface="Cambria" pitchFamily="34" charset="-122"/>
-                <a:cs typeface="Cambria" pitchFamily="34" charset="-120"/>
-              </a:rPr>
-              <a:t>26207</a:t>
-            </a:r>
-            <a:endParaRPr lang="en-US" sz="4400" dirty="0"/>
-          </a:p>
-        </p:txBody>
-      </p:sp>
-      <p:sp>
-        <p:nvSpPr>
-          <p:cNvPr id="13" name="Stat label"/>
-          <p:cNvSpPr txBox="1"/>
-          <p:nvPr/>
-        </p:nvSpPr>
-        <p:spPr>
-          <a:xfrm>
-            <a:off x="6370168" y="2697480"/>
-            <a:ext cx="2293544" cy="612648"/>
-          </a:xfrm>
-          <a:prstGeom prst="rect">
-            <a:avLst/>
-          </a:prstGeom>
-          <a:noFill/>
-          <a:ln/>
-        </p:spPr>
-        <p:txBody>
-          <a:bodyPr wrap="square" lIns="0" tIns="0" rIns="0" bIns="0" rtlCol="0" anchor="t"/>
-          <a:lstStyle/>
-          <a:p>
-            <a:pPr algn="ctr" indent="0" marL="0">
-              <a:buNone/>
-            </a:pPr>
-            <a:r>
-              <a:rPr lang="en-US" sz="1400" dirty="0">
-                <a:solidFill>
-                  <a:schemeClr val="tx2"/>
-                </a:solidFill>
-              </a:rPr>
-              <a:t>the lab's seed</a:t>
-            </a:r>
-            <a:endParaRPr lang="en-US" sz="1400" dirty="0"/>
-          </a:p>
-        </p:txBody>
-      </p:sp>
-      <p:sp>
-        <p:nvSpPr>
-          <p:cNvPr id="14" name="Stat card"/>
+              </a:rPr>
+              <a:t>Differences of the value function value lumps; its slopes price stocks and satisfy the price recursion, Chapter 6's costate equation on a calendar, averaged over events.</a:t>
+            </a:r>
+            <a:endParaRPr lang="en-US" sz="1500" dirty="0"/>
+          </a:p>
+        </p:txBody>
+      </p:sp>
+      <p:sp>
+        <p:nvSpPr>
+          <p:cNvPr id="14" name="Number"/>
           <p:cNvSpPr/>
           <p:nvPr/>
         </p:nvSpPr>
         <p:spPr>
           <a:xfrm>
-            <a:off x="9075191" y="1691640"/>
-            <a:ext cx="2567864" cy="1691640"/>
-          </a:xfrm>
-          <a:prstGeom prst="roundRect">
-            <a:avLst>
-              <a:gd name="adj" fmla="val 4324"/>
-            </a:avLst>
+            <a:off x="548640" y="4425696"/>
+            <a:ext cx="566928" cy="566928"/>
+          </a:xfrm>
+          <a:prstGeom prst="ellipse">
+            <a:avLst/>
           </a:prstGeom>
           <a:solidFill>
-            <a:schemeClr val="bg2"/>
+            <a:schemeClr val="accent1"/>
           </a:solidFill>
-          <a:ln w="9525">
+          <a:ln w="6350">
             <a:solidFill>
-              <a:srgbClr val="C4CBD8"/>
+              <a:schemeClr val="accent1"/>
             </a:solidFill>
             <a:prstDash val="solid"/>
           </a:ln>
@@ -15564,14 +15978,14 @@
       </p:sp>
       <p:sp>
         <p:nvSpPr>
-          <p:cNvPr id="15" name="Stat value"/>
+          <p:cNvPr id="15" name="Text 12"/>
           <p:cNvSpPr txBox="1"/>
           <p:nvPr/>
         </p:nvSpPr>
         <p:spPr>
           <a:xfrm>
-            <a:off x="9212351" y="1801368"/>
-            <a:ext cx="2293544" cy="914400"/>
+            <a:off x="548640" y="4425696"/>
+            <a:ext cx="566928" cy="566928"/>
           </a:xfrm>
           <a:prstGeom prst="rect">
             <a:avLst/>
@@ -15587,145 +16001,153 @@
               <a:buNone/>
             </a:pPr>
             <a:r>
-              <a:rPr lang="en-US" sz="3000" b="1" dirty="0">
+              <a:rPr lang="en-US" sz="1500" b="1" dirty="0">
+                <a:solidFill>
+                  <a:schemeClr val="bg1"/>
+                </a:solidFill>
+                <a:latin typeface="Calibri" pitchFamily="34" charset="0"/>
+                <a:ea typeface="Calibri" pitchFamily="34" charset="-122"/>
+                <a:cs typeface="Calibri" pitchFamily="34" charset="-120"/>
+              </a:rPr>
+              <a:t>4</a:t>
+            </a:r>
+            <a:endParaRPr lang="en-US" sz="1500" dirty="0"/>
+          </a:p>
+        </p:txBody>
+      </p:sp>
+      <p:sp>
+        <p:nvSpPr>
+          <p:cNvPr id="16" name="Row text"/>
+          <p:cNvSpPr txBox="1"/>
+          <p:nvPr/>
+        </p:nvSpPr>
+        <p:spPr>
+          <a:xfrm>
+            <a:off x="1325880" y="4379976"/>
+            <a:ext cx="10317175" cy="841248"/>
+          </a:xfrm>
+          <a:prstGeom prst="rect">
+            <a:avLst/>
+          </a:prstGeom>
+          <a:noFill/>
+          <a:ln/>
+        </p:spPr>
+        <p:txBody>
+          <a:bodyPr wrap="square" lIns="0" tIns="0" rIns="0" bIns="0" rtlCol="0" anchor="ctr"/>
+          <a:lstStyle/>
+          <a:p>
+            <a:pPr indent="0" marL="0">
+              <a:buNone/>
+            </a:pPr>
+            <a:r>
+              <a:rPr lang="en-US" sz="1500" dirty="0">
                 <a:solidFill>
                   <a:schemeClr val="tx1"/>
                 </a:solidFill>
-                <a:latin typeface="Cambria" pitchFamily="34" charset="0"/>
-                <a:ea typeface="Cambria" pitchFamily="34" charset="-122"/>
-                <a:cs typeface="Cambria" pitchFamily="34" charset="-120"/>
-              </a:rPr>
-              <a:t>AXIOM-07</a:t>
-            </a:r>
-            <a:endParaRPr lang="en-US" sz="3000" dirty="0"/>
-          </a:p>
-        </p:txBody>
-      </p:sp>
-      <p:sp>
-        <p:nvSpPr>
-          <p:cNvPr id="16" name="Stat label"/>
+              </a:rPr>
+              <a:t>Best rules take simple shapes: thresholds for yes-or-no decisions, and targets for maintained stocks, with a margin set by the critical ratio. The best rule is at least as good as re-planning, which is at least as good as the best plan; the gap between rule and plan is the value of information.</a:t>
+            </a:r>
+            <a:endParaRPr lang="en-US" sz="1500" dirty="0"/>
+          </a:p>
+        </p:txBody>
+      </p:sp>
+      <p:sp>
+        <p:nvSpPr>
+          <p:cNvPr id="17" name="Number"/>
+          <p:cNvSpPr/>
+          <p:nvPr/>
+        </p:nvSpPr>
+        <p:spPr>
+          <a:xfrm>
+            <a:off x="548640" y="5321808"/>
+            <a:ext cx="566928" cy="566928"/>
+          </a:xfrm>
+          <a:prstGeom prst="ellipse">
+            <a:avLst/>
+          </a:prstGeom>
+          <a:solidFill>
+            <a:schemeClr val="accent1"/>
+          </a:solidFill>
+          <a:ln w="6350">
+            <a:solidFill>
+              <a:schemeClr val="accent1"/>
+            </a:solidFill>
+            <a:prstDash val="solid"/>
+          </a:ln>
+        </p:spPr>
+      </p:sp>
+      <p:sp>
+        <p:nvSpPr>
+          <p:cNvPr id="18" name="Text 15"/>
           <p:cNvSpPr txBox="1"/>
           <p:nvPr/>
         </p:nvSpPr>
         <p:spPr>
           <a:xfrm>
-            <a:off x="9212351" y="2697480"/>
-            <a:ext cx="2293544" cy="612648"/>
-          </a:xfrm>
-          <a:prstGeom prst="rect">
-            <a:avLst/>
-          </a:prstGeom>
-          <a:noFill/>
-          <a:ln/>
-        </p:spPr>
-        <p:txBody>
-          <a:bodyPr wrap="square" lIns="0" tIns="0" rIns="0" bIns="0" rtlCol="0" anchor="t"/>
+            <a:off x="548640" y="5321808"/>
+            <a:ext cx="566928" cy="566928"/>
+          </a:xfrm>
+          <a:prstGeom prst="rect">
+            <a:avLst/>
+          </a:prstGeom>
+          <a:noFill/>
+          <a:ln/>
+        </p:spPr>
+        <p:txBody>
+          <a:bodyPr wrap="square" lIns="0" tIns="0" rIns="0" bIns="0" rtlCol="0" anchor="ctr"/>
           <a:lstStyle/>
           <a:p>
             <a:pPr algn="ctr" indent="0" marL="0">
               <a:buNone/>
             </a:pPr>
             <a:r>
-              <a:rPr lang="en-US" sz="1400" dirty="0">
-                <a:solidFill>
-                  <a:schemeClr val="tx2"/>
-                </a:solidFill>
-              </a:rPr>
-              <a:t>AXIOM Lab 2.7</a:t>
-            </a:r>
-            <a:endParaRPr lang="en-US" sz="1400" dirty="0"/>
-          </a:p>
-        </p:txBody>
-      </p:sp>
-      <p:sp>
-        <p:nvSpPr>
-          <p:cNvPr id="17" name="Bullets"/>
+              <a:rPr lang="en-US" sz="1500" b="1" dirty="0">
+                <a:solidFill>
+                  <a:schemeClr val="bg1"/>
+                </a:solidFill>
+                <a:latin typeface="Calibri" pitchFamily="34" charset="0"/>
+                <a:ea typeface="Calibri" pitchFamily="34" charset="-122"/>
+                <a:cs typeface="Calibri" pitchFamily="34" charset="-120"/>
+              </a:rPr>
+              <a:t>5</a:t>
+            </a:r>
+            <a:endParaRPr lang="en-US" sz="1500" dirty="0"/>
+          </a:p>
+        </p:txBody>
+      </p:sp>
+      <p:sp>
+        <p:nvSpPr>
+          <p:cNvPr id="19" name="Row text"/>
           <p:cNvSpPr txBox="1"/>
           <p:nvPr/>
         </p:nvSpPr>
         <p:spPr>
           <a:xfrm>
-            <a:off x="548640" y="3703320"/>
-            <a:ext cx="11094415" cy="2468880"/>
-          </a:xfrm>
-          <a:prstGeom prst="rect">
-            <a:avLst/>
-          </a:prstGeom>
-          <a:noFill/>
-          <a:ln/>
-        </p:spPr>
-        <p:txBody>
-          <a:bodyPr wrap="square" lIns="635" tIns="635" rIns="635" bIns="635" rtlCol="0" anchor="t"/>
-          <a:lstStyle/>
-          <a:p>
-            <a:pPr marL="228600" indent="-228600">
-              <a:spcAft>
-                <a:spcPts val="800"/>
-              </a:spcAft>
-              <a:buSzPct val="100000"/>
-              <a:buChar char="•"/>
-            </a:pPr>
-            <a:r>
-              <a:rPr lang="en-US" sz="1700" b="1" dirty="0">
+            <a:off x="1325880" y="5276088"/>
+            <a:ext cx="10317175" cy="841248"/>
+          </a:xfrm>
+          <a:prstGeom prst="rect">
+            <a:avLst/>
+          </a:prstGeom>
+          <a:noFill/>
+          <a:ln/>
+        </p:spPr>
+        <p:txBody>
+          <a:bodyPr wrap="square" lIns="0" tIns="0" rIns="0" bIns="0" rtlCol="0" anchor="ctr"/>
+          <a:lstStyle/>
+          <a:p>
+            <a:pPr indent="0" marL="0">
+              <a:buNone/>
+            </a:pPr>
+            <a:r>
+              <a:rPr lang="en-US" sz="1500" dirty="0">
                 <a:solidFill>
                   <a:schemeClr val="tx1"/>
                 </a:solidFill>
               </a:rPr>
-              <a:t>Notebook</a:t>
-            </a:r>
-            <a:r>
-              <a:rPr lang="en-US" sz="1700" dirty="0">
-                <a:solidFill>
-                  <a:schemeClr val="tx1"/>
-                </a:solidFill>
-              </a:rPr>
-              <a:t> DCT_V2_Ch07_Lab.ipynb: Worked Example 7.1 and the lab's five steps in eight panels, ready for Colab</a:t>
-            </a:r>
-            <a:endParaRPr lang="en-US" sz="1700" dirty="0"/>
-          </a:p>
-          <a:p>
-            <a:pPr marL="228600" indent="-228600">
-              <a:spcAft>
-                <a:spcPts val="800"/>
-              </a:spcAft>
-              <a:buSzPct val="100000"/>
-              <a:buChar char="•"/>
-            </a:pPr>
-            <a:r>
-              <a:rPr lang="en-US" sz="1700" b="1" dirty="0">
-                <a:solidFill>
-                  <a:schemeClr val="tx1"/>
-                </a:solidFill>
-              </a:rPr>
-              <a:t>Workbook</a:t>
-            </a:r>
-            <a:r>
-              <a:rPr lang="en-US" sz="1700" dirty="0">
-                <a:solidFill>
-                  <a:schemeClr val="tx1"/>
-                </a:solidFill>
-              </a:rPr>
-              <a:t> DCT_V2_Ch07_Lab.xlsx: the critical ratio, a twelve-quarter backward induction, the Bellman certificate, prices and the upper bound, in formulas</a:t>
-            </a:r>
-            <a:endParaRPr lang="en-US" sz="1700" dirty="0"/>
-          </a:p>
-          <a:p>
-            <a:pPr marL="228600" indent="-228600">
-              <a:spcAft>
-                <a:spcPts val="800"/>
-              </a:spcAft>
-              <a:buSzPct val="100000"/>
-              <a:buChar char="•"/>
-            </a:pPr>
-            <a:r>
-              <a:rPr lang="en-US" sz="1700" dirty="0">
-                <a:solidFill>
-                  <a:schemeClr val="tx1"/>
-                </a:solidFill>
-              </a:rPr>
-              <a:t>Every number on these slides is the book's, and both companions check it</a:t>
-            </a:r>
-            <a:endParaRPr lang="en-US" sz="1700" dirty="0"/>
+              <a:t>Backward induction, value and policy iteration, and linear programming compute values and rules with error bounds that certify them; approximations scale to many stocks, with errors amplified by the effective horizon.</a:t>
+            </a:r>
+            <a:endParaRPr lang="en-US" sz="1500" dirty="0"/>
           </a:p>
         </p:txBody>
       </p:sp>
@@ -15831,6 +16253,655 @@
                   <a:schemeClr val="accent1"/>
                 </a:solidFill>
               </a:rPr>
+              <a:t>THIS WEEK'S LABORATORY</a:t>
+            </a:r>
+            <a:endParaRPr lang="en-US" sz="1200" dirty="0"/>
+          </a:p>
+        </p:txBody>
+      </p:sp>
+      <p:sp>
+        <p:nvSpPr>
+          <p:cNvPr id="4" name="Text 1"/>
+          <p:cNvSpPr/>
+          <p:nvPr>
+            <p:ph idx="103" type="title" hasCustomPrompt="1"/>
+          </p:nvPr>
+        </p:nvSpPr>
+        <p:spPr>
+          <a:xfrm>
+            <a:off x="548640" y="658368"/>
+            <a:ext cx="11094415" cy="868680"/>
+          </a:xfrm>
+          <a:prstGeom prst="rect">
+            <a:avLst/>
+          </a:prstGeom>
+          <a:noFill/>
+          <a:ln/>
+        </p:spPr>
+        <p:txBody>
+          <a:bodyPr wrap="square" lIns="0" tIns="0" rIns="0" bIns="0" rtlCol="0" anchor="t"/>
+          <a:lstStyle/>
+          <a:p>
+            <a:pPr algn="l" indent="0" marL="0">
+              <a:buNone/>
+            </a:pPr>
+            <a:r>
+              <a:rPr lang="en-US" sz="3200" b="1" dirty="0">
+                <a:solidFill>
+                  <a:schemeClr val="tx1"/>
+                </a:solidFill>
+                <a:latin typeface="Cambria" pitchFamily="34" charset="0"/>
+                <a:ea typeface="Cambria" pitchFamily="34" charset="-122"/>
+                <a:cs typeface="Cambria" pitchFamily="34" charset="-120"/>
+              </a:rPr>
+              <a:t>Notebook and workbook reproduce the book</a:t>
+            </a:r>
+            <a:endParaRPr lang="en-US" sz="3200" dirty="0"/>
+          </a:p>
+        </p:txBody>
+      </p:sp>
+      <p:sp>
+        <p:nvSpPr>
+          <p:cNvPr id="5" name="Stat card"/>
+          <p:cNvSpPr/>
+          <p:nvPr/>
+        </p:nvSpPr>
+        <p:spPr>
+          <a:xfrm>
+            <a:off x="548640" y="1691640"/>
+            <a:ext cx="2567864" cy="1691640"/>
+          </a:xfrm>
+          <a:prstGeom prst="roundRect">
+            <a:avLst>
+              <a:gd name="adj" fmla="val 4324"/>
+            </a:avLst>
+          </a:prstGeom>
+          <a:solidFill>
+            <a:schemeClr val="tx1"/>
+          </a:solidFill>
+          <a:ln w="9525">
+            <a:solidFill>
+              <a:srgbClr val="0F1E3D"/>
+            </a:solidFill>
+            <a:prstDash val="solid"/>
+          </a:ln>
+        </p:spPr>
+      </p:sp>
+      <p:sp>
+        <p:nvSpPr>
+          <p:cNvPr id="6" name="Stat value"/>
+          <p:cNvSpPr txBox="1"/>
+          <p:nvPr/>
+        </p:nvSpPr>
+        <p:spPr>
+          <a:xfrm>
+            <a:off x="685800" y="1801368"/>
+            <a:ext cx="2293544" cy="914400"/>
+          </a:xfrm>
+          <a:prstGeom prst="rect">
+            <a:avLst/>
+          </a:prstGeom>
+          <a:noFill/>
+          <a:ln/>
+        </p:spPr>
+        <p:txBody>
+          <a:bodyPr wrap="square" lIns="0" tIns="0" rIns="0" bIns="0" rtlCol="0" anchor="ctr"/>
+          <a:lstStyle/>
+          <a:p>
+            <a:pPr algn="ctr" indent="0" marL="0">
+              <a:buNone/>
+            </a:pPr>
+            <a:r>
+              <a:rPr lang="en-US" sz="4400" b="1" dirty="0">
+                <a:solidFill>
+                  <a:schemeClr val="accent1"/>
+                </a:solidFill>
+                <a:latin typeface="Cambria" pitchFamily="34" charset="0"/>
+                <a:ea typeface="Cambria" pitchFamily="34" charset="-122"/>
+                <a:cs typeface="Cambria" pitchFamily="34" charset="-120"/>
+              </a:rPr>
+              <a:t>25</a:t>
+            </a:r>
+            <a:endParaRPr lang="en-US" sz="4400" dirty="0"/>
+          </a:p>
+        </p:txBody>
+      </p:sp>
+      <p:sp>
+        <p:nvSpPr>
+          <p:cNvPr id="7" name="Stat label"/>
+          <p:cNvSpPr txBox="1"/>
+          <p:nvPr/>
+        </p:nvSpPr>
+        <p:spPr>
+          <a:xfrm>
+            <a:off x="685800" y="2697480"/>
+            <a:ext cx="2293544" cy="612648"/>
+          </a:xfrm>
+          <a:prstGeom prst="rect">
+            <a:avLst/>
+          </a:prstGeom>
+          <a:noFill/>
+          <a:ln/>
+        </p:spPr>
+        <p:txBody>
+          <a:bodyPr wrap="square" lIns="0" tIns="0" rIns="0" bIns="0" rtlCol="0" anchor="t"/>
+          <a:lstStyle/>
+          <a:p>
+            <a:pPr algn="ctr" indent="0" marL="0">
+              <a:buNone/>
+            </a:pPr>
+            <a:r>
+              <a:rPr lang="en-US" sz="1400" dirty="0">
+                <a:solidFill>
+                  <a:schemeClr val="bg2"/>
+                </a:solidFill>
+              </a:rPr>
+              <a:t>notebook checkpoints, every one PASS</a:t>
+            </a:r>
+            <a:endParaRPr lang="en-US" sz="1400" dirty="0"/>
+          </a:p>
+        </p:txBody>
+      </p:sp>
+      <p:sp>
+        <p:nvSpPr>
+          <p:cNvPr id="8" name="Stat card"/>
+          <p:cNvSpPr/>
+          <p:nvPr/>
+        </p:nvSpPr>
+        <p:spPr>
+          <a:xfrm>
+            <a:off x="3390824" y="1691640"/>
+            <a:ext cx="2567864" cy="1691640"/>
+          </a:xfrm>
+          <a:prstGeom prst="roundRect">
+            <a:avLst>
+              <a:gd name="adj" fmla="val 4324"/>
+            </a:avLst>
+          </a:prstGeom>
+          <a:solidFill>
+            <a:schemeClr val="bg2"/>
+          </a:solidFill>
+          <a:ln w="9525">
+            <a:solidFill>
+              <a:srgbClr val="C4CBD8"/>
+            </a:solidFill>
+            <a:prstDash val="solid"/>
+          </a:ln>
+        </p:spPr>
+      </p:sp>
+      <p:sp>
+        <p:nvSpPr>
+          <p:cNvPr id="9" name="Stat value"/>
+          <p:cNvSpPr txBox="1"/>
+          <p:nvPr/>
+        </p:nvSpPr>
+        <p:spPr>
+          <a:xfrm>
+            <a:off x="3527984" y="1801368"/>
+            <a:ext cx="2293544" cy="914400"/>
+          </a:xfrm>
+          <a:prstGeom prst="rect">
+            <a:avLst/>
+          </a:prstGeom>
+          <a:noFill/>
+          <a:ln/>
+        </p:spPr>
+        <p:txBody>
+          <a:bodyPr wrap="square" lIns="0" tIns="0" rIns="0" bIns="0" rtlCol="0" anchor="ctr"/>
+          <a:lstStyle/>
+          <a:p>
+            <a:pPr algn="ctr" indent="0" marL="0">
+              <a:buNone/>
+            </a:pPr>
+            <a:r>
+              <a:rPr lang="en-US" sz="4400" b="1" dirty="0">
+                <a:solidFill>
+                  <a:schemeClr val="tx1"/>
+                </a:solidFill>
+                <a:latin typeface="Cambria" pitchFamily="34" charset="0"/>
+                <a:ea typeface="Cambria" pitchFamily="34" charset="-122"/>
+                <a:cs typeface="Cambria" pitchFamily="34" charset="-120"/>
+              </a:rPr>
+              <a:t>26</a:t>
+            </a:r>
+            <a:endParaRPr lang="en-US" sz="4400" dirty="0"/>
+          </a:p>
+        </p:txBody>
+      </p:sp>
+      <p:sp>
+        <p:nvSpPr>
+          <p:cNvPr id="10" name="Stat label"/>
+          <p:cNvSpPr txBox="1"/>
+          <p:nvPr/>
+        </p:nvSpPr>
+        <p:spPr>
+          <a:xfrm>
+            <a:off x="3527984" y="2697480"/>
+            <a:ext cx="2293544" cy="612648"/>
+          </a:xfrm>
+          <a:prstGeom prst="rect">
+            <a:avLst/>
+          </a:prstGeom>
+          <a:noFill/>
+          <a:ln/>
+        </p:spPr>
+        <p:txBody>
+          <a:bodyPr wrap="square" lIns="0" tIns="0" rIns="0" bIns="0" rtlCol="0" anchor="t"/>
+          <a:lstStyle/>
+          <a:p>
+            <a:pPr algn="ctr" indent="0" marL="0">
+              <a:buNone/>
+            </a:pPr>
+            <a:r>
+              <a:rPr lang="en-US" sz="1400" dirty="0">
+                <a:solidFill>
+                  <a:schemeClr val="tx2"/>
+                </a:solidFill>
+              </a:rPr>
+              <a:t>workbook checks against the engine, ALL PASS</a:t>
+            </a:r>
+            <a:endParaRPr lang="en-US" sz="1400" dirty="0"/>
+          </a:p>
+        </p:txBody>
+      </p:sp>
+      <p:sp>
+        <p:nvSpPr>
+          <p:cNvPr id="11" name="Stat card"/>
+          <p:cNvSpPr/>
+          <p:nvPr/>
+        </p:nvSpPr>
+        <p:spPr>
+          <a:xfrm>
+            <a:off x="6233008" y="1691640"/>
+            <a:ext cx="2567864" cy="1691640"/>
+          </a:xfrm>
+          <a:prstGeom prst="roundRect">
+            <a:avLst>
+              <a:gd name="adj" fmla="val 4324"/>
+            </a:avLst>
+          </a:prstGeom>
+          <a:solidFill>
+            <a:schemeClr val="bg2"/>
+          </a:solidFill>
+          <a:ln w="9525">
+            <a:solidFill>
+              <a:srgbClr val="C4CBD8"/>
+            </a:solidFill>
+            <a:prstDash val="solid"/>
+          </a:ln>
+        </p:spPr>
+      </p:sp>
+      <p:sp>
+        <p:nvSpPr>
+          <p:cNvPr id="12" name="Stat value"/>
+          <p:cNvSpPr txBox="1"/>
+          <p:nvPr/>
+        </p:nvSpPr>
+        <p:spPr>
+          <a:xfrm>
+            <a:off x="6370168" y="1801368"/>
+            <a:ext cx="2293544" cy="914400"/>
+          </a:xfrm>
+          <a:prstGeom prst="rect">
+            <a:avLst/>
+          </a:prstGeom>
+          <a:noFill/>
+          <a:ln/>
+        </p:spPr>
+        <p:txBody>
+          <a:bodyPr wrap="square" lIns="0" tIns="0" rIns="0" bIns="0" rtlCol="0" anchor="ctr"/>
+          <a:lstStyle/>
+          <a:p>
+            <a:pPr algn="ctr" indent="0" marL="0">
+              <a:buNone/>
+            </a:pPr>
+            <a:r>
+              <a:rPr lang="en-US" sz="4400" b="1" dirty="0">
+                <a:solidFill>
+                  <a:schemeClr val="tx1"/>
+                </a:solidFill>
+                <a:latin typeface="Cambria" pitchFamily="34" charset="0"/>
+                <a:ea typeface="Cambria" pitchFamily="34" charset="-122"/>
+                <a:cs typeface="Cambria" pitchFamily="34" charset="-120"/>
+              </a:rPr>
+              <a:t>26207</a:t>
+            </a:r>
+            <a:endParaRPr lang="en-US" sz="4400" dirty="0"/>
+          </a:p>
+        </p:txBody>
+      </p:sp>
+      <p:sp>
+        <p:nvSpPr>
+          <p:cNvPr id="13" name="Stat label"/>
+          <p:cNvSpPr txBox="1"/>
+          <p:nvPr/>
+        </p:nvSpPr>
+        <p:spPr>
+          <a:xfrm>
+            <a:off x="6370168" y="2697480"/>
+            <a:ext cx="2293544" cy="612648"/>
+          </a:xfrm>
+          <a:prstGeom prst="rect">
+            <a:avLst/>
+          </a:prstGeom>
+          <a:noFill/>
+          <a:ln/>
+        </p:spPr>
+        <p:txBody>
+          <a:bodyPr wrap="square" lIns="0" tIns="0" rIns="0" bIns="0" rtlCol="0" anchor="t"/>
+          <a:lstStyle/>
+          <a:p>
+            <a:pPr algn="ctr" indent="0" marL="0">
+              <a:buNone/>
+            </a:pPr>
+            <a:r>
+              <a:rPr lang="en-US" sz="1400" dirty="0">
+                <a:solidFill>
+                  <a:schemeClr val="tx2"/>
+                </a:solidFill>
+              </a:rPr>
+              <a:t>the lab's seed</a:t>
+            </a:r>
+            <a:endParaRPr lang="en-US" sz="1400" dirty="0"/>
+          </a:p>
+        </p:txBody>
+      </p:sp>
+      <p:sp>
+        <p:nvSpPr>
+          <p:cNvPr id="14" name="Stat card"/>
+          <p:cNvSpPr/>
+          <p:nvPr/>
+        </p:nvSpPr>
+        <p:spPr>
+          <a:xfrm>
+            <a:off x="9075191" y="1691640"/>
+            <a:ext cx="2567864" cy="1691640"/>
+          </a:xfrm>
+          <a:prstGeom prst="roundRect">
+            <a:avLst>
+              <a:gd name="adj" fmla="val 4324"/>
+            </a:avLst>
+          </a:prstGeom>
+          <a:solidFill>
+            <a:schemeClr val="bg2"/>
+          </a:solidFill>
+          <a:ln w="9525">
+            <a:solidFill>
+              <a:srgbClr val="C4CBD8"/>
+            </a:solidFill>
+            <a:prstDash val="solid"/>
+          </a:ln>
+        </p:spPr>
+      </p:sp>
+      <p:sp>
+        <p:nvSpPr>
+          <p:cNvPr id="15" name="Stat value"/>
+          <p:cNvSpPr txBox="1"/>
+          <p:nvPr/>
+        </p:nvSpPr>
+        <p:spPr>
+          <a:xfrm>
+            <a:off x="9212351" y="1801368"/>
+            <a:ext cx="2293544" cy="914400"/>
+          </a:xfrm>
+          <a:prstGeom prst="rect">
+            <a:avLst/>
+          </a:prstGeom>
+          <a:noFill/>
+          <a:ln/>
+        </p:spPr>
+        <p:txBody>
+          <a:bodyPr wrap="square" lIns="0" tIns="0" rIns="0" bIns="0" rtlCol="0" anchor="ctr"/>
+          <a:lstStyle/>
+          <a:p>
+            <a:pPr algn="ctr" indent="0" marL="0">
+              <a:buNone/>
+            </a:pPr>
+            <a:r>
+              <a:rPr lang="en-US" sz="3000" b="1" dirty="0">
+                <a:solidFill>
+                  <a:schemeClr val="tx1"/>
+                </a:solidFill>
+                <a:latin typeface="Cambria" pitchFamily="34" charset="0"/>
+                <a:ea typeface="Cambria" pitchFamily="34" charset="-122"/>
+                <a:cs typeface="Cambria" pitchFamily="34" charset="-120"/>
+              </a:rPr>
+              <a:t>AXIOM-07</a:t>
+            </a:r>
+            <a:endParaRPr lang="en-US" sz="3000" dirty="0"/>
+          </a:p>
+        </p:txBody>
+      </p:sp>
+      <p:sp>
+        <p:nvSpPr>
+          <p:cNvPr id="16" name="Stat label"/>
+          <p:cNvSpPr txBox="1"/>
+          <p:nvPr/>
+        </p:nvSpPr>
+        <p:spPr>
+          <a:xfrm>
+            <a:off x="9212351" y="2697480"/>
+            <a:ext cx="2293544" cy="612648"/>
+          </a:xfrm>
+          <a:prstGeom prst="rect">
+            <a:avLst/>
+          </a:prstGeom>
+          <a:noFill/>
+          <a:ln/>
+        </p:spPr>
+        <p:txBody>
+          <a:bodyPr wrap="square" lIns="0" tIns="0" rIns="0" bIns="0" rtlCol="0" anchor="t"/>
+          <a:lstStyle/>
+          <a:p>
+            <a:pPr algn="ctr" indent="0" marL="0">
+              <a:buNone/>
+            </a:pPr>
+            <a:r>
+              <a:rPr lang="en-US" sz="1400" dirty="0">
+                <a:solidFill>
+                  <a:schemeClr val="tx2"/>
+                </a:solidFill>
+              </a:rPr>
+              <a:t>AXIOM Lab 2.7</a:t>
+            </a:r>
+            <a:endParaRPr lang="en-US" sz="1400" dirty="0"/>
+          </a:p>
+        </p:txBody>
+      </p:sp>
+      <p:sp>
+        <p:nvSpPr>
+          <p:cNvPr id="17" name="Bullets"/>
+          <p:cNvSpPr txBox="1"/>
+          <p:nvPr/>
+        </p:nvSpPr>
+        <p:spPr>
+          <a:xfrm>
+            <a:off x="548640" y="3703320"/>
+            <a:ext cx="11094415" cy="2468880"/>
+          </a:xfrm>
+          <a:prstGeom prst="rect">
+            <a:avLst/>
+          </a:prstGeom>
+          <a:noFill/>
+          <a:ln/>
+        </p:spPr>
+        <p:txBody>
+          <a:bodyPr wrap="square" lIns="635" tIns="635" rIns="635" bIns="635" rtlCol="0" anchor="t"/>
+          <a:lstStyle/>
+          <a:p>
+            <a:pPr marL="228600" indent="-228600">
+              <a:spcAft>
+                <a:spcPts val="800"/>
+              </a:spcAft>
+              <a:buSzPct val="100000"/>
+              <a:buChar char="•"/>
+            </a:pPr>
+            <a:r>
+              <a:rPr lang="en-US" sz="1700" b="1" dirty="0">
+                <a:solidFill>
+                  <a:schemeClr val="tx1"/>
+                </a:solidFill>
+              </a:rPr>
+              <a:t>Notebook</a:t>
+            </a:r>
+            <a:r>
+              <a:rPr lang="en-US" sz="1700" dirty="0">
+                <a:solidFill>
+                  <a:schemeClr val="tx1"/>
+                </a:solidFill>
+              </a:rPr>
+              <a:t> DCT_V2_Ch07_Lab.ipynb: Worked Example 7.1 and the lab's five steps in eight panels, ready for Colab</a:t>
+            </a:r>
+            <a:endParaRPr lang="en-US" sz="1700" dirty="0"/>
+          </a:p>
+          <a:p>
+            <a:pPr marL="228600" indent="-228600">
+              <a:spcAft>
+                <a:spcPts val="800"/>
+              </a:spcAft>
+              <a:buSzPct val="100000"/>
+              <a:buChar char="•"/>
+            </a:pPr>
+            <a:r>
+              <a:rPr lang="en-US" sz="1700" b="1" dirty="0">
+                <a:solidFill>
+                  <a:schemeClr val="tx1"/>
+                </a:solidFill>
+              </a:rPr>
+              <a:t>Workbook</a:t>
+            </a:r>
+            <a:r>
+              <a:rPr lang="en-US" sz="1700" dirty="0">
+                <a:solidFill>
+                  <a:schemeClr val="tx1"/>
+                </a:solidFill>
+              </a:rPr>
+              <a:t> DCT_V2_Ch07_Lab.xlsx: the critical ratio, a twelve-quarter backward induction, the Bellman certificate, prices and the upper bound, in formulas</a:t>
+            </a:r>
+            <a:endParaRPr lang="en-US" sz="1700" dirty="0"/>
+          </a:p>
+          <a:p>
+            <a:pPr marL="228600" indent="-228600">
+              <a:spcAft>
+                <a:spcPts val="800"/>
+              </a:spcAft>
+              <a:buSzPct val="100000"/>
+              <a:buChar char="•"/>
+            </a:pPr>
+            <a:r>
+              <a:rPr lang="en-US" sz="1700" dirty="0">
+                <a:solidFill>
+                  <a:schemeClr val="tx1"/>
+                </a:solidFill>
+              </a:rPr>
+              <a:t>Every number on these slides is the book's, and both companions check it</a:t>
+            </a:r>
+            <a:endParaRPr lang="en-US" sz="1700" dirty="0"/>
+          </a:p>
+        </p:txBody>
+      </p:sp>
+      <p:sp>
+        <p:nvSpPr>
+          <p:cNvPr id="25" name="Slide Number Placeholder 0"/>
+          <p:cNvSpPr>
+            <a:spLocks noGrp="1"/>
+          </p:cNvSpPr>
+          <p:nvPr>
+            <p:ph type="sldNum" sz="quarter" idx="4294967295"/>
+          </p:nvPr>
+        </p:nvSpPr>
+        <p:spPr>
+          <a:xfrm>
+            <a:off x="11094415" y="6382512"/>
+            <a:ext cx="548640" cy="237744"/>
+          </a:xfrm>
+          <a:prstGeom prst="rect">
+            <a:avLst/>
+          </a:prstGeom>
+          <a:extLst>
+            <a:ext uri="{C572A759-6A51-4108-AA02-DFA0A04FC94B}">
+              <ma14:wrappingTextBoxFlag xmlns:ma14="http://schemas.microsoft.com/office/mac/drawingml/2011/main" val="0"/>
+            </a:ext>
+          </a:extLst>
+        </p:spPr>
+        <p:txBody>
+          <a:bodyPr/>
+          <a:lstStyle>
+            <a:lvl1pPr>
+              <a:defRPr sz="1000">
+                <a:solidFill>
+                  <a:srgbClr val="5A6B82"/>
+                </a:solidFill>
+              </a:defRPr>
+            </a:lvl1pPr>
+          </a:lstStyle>
+          <a:p>
+            <a:pPr algn="r"/>
+            <a:fld id="{F7021451-1387-4CA6-816F-3879F97B5CBC}" type="slidenum">
+              <a:rPr b="0" lang="en-US"/>
+              <a:t>23</a:t>
+            </a:fld>
+            <a:endParaRPr lang="en-US"/>
+          </a:p>
+        </p:txBody>
+      </p:sp>
+    </p:spTree>
+  </p:cSld>
+  <p:clrMapOvr>
+    <a:masterClrMapping/>
+  </p:clrMapOvr>
+</p:sld>
+</file>
+
+<file path=ppt/slides/slide24.xml><?xml version="1.0" encoding="utf-8"?>
+<p:sld xmlns:a="http://schemas.openxmlformats.org/drawingml/2006/main" xmlns:r="http://schemas.openxmlformats.org/officeDocument/2006/relationships" xmlns:p="http://schemas.openxmlformats.org/presentationml/2006/main">
+  <p:cSld name="Slide 24">
+    <p:spTree>
+      <p:nvGrpSpPr>
+        <p:cNvPr id="1" name=""/>
+        <p:cNvGrpSpPr/>
+        <p:nvPr/>
+      </p:nvGrpSpPr>
+      <p:grpSpPr>
+        <a:xfrm>
+          <a:off x="0" y="0"/>
+          <a:ext cx="0" cy="0"/>
+          <a:chOff x="0" y="0"/>
+          <a:chExt cx="0" cy="0"/>
+        </a:xfrm>
+      </p:grpSpPr>
+      <p:sp>
+        <p:nvSpPr>
+          <p:cNvPr id="3" name="Text 1"/>
+          <p:cNvSpPr/>
+          <p:nvPr>
+            <p:ph idx="102" type="body" hasCustomPrompt="1"/>
+          </p:nvPr>
+        </p:nvSpPr>
+        <p:spPr>
+          <a:xfrm>
+            <a:off x="548640" y="347472"/>
+            <a:ext cx="11094415" cy="292608"/>
+          </a:xfrm>
+          <a:prstGeom prst="rect">
+            <a:avLst/>
+          </a:prstGeom>
+          <a:noFill/>
+          <a:ln/>
+        </p:spPr>
+        <p:txBody>
+          <a:bodyPr wrap="square" lIns="0" tIns="0" rIns="0" bIns="0" rtlCol="0"/>
+          <a:lstStyle/>
+          <a:p>
+            <a:pPr indent="0" marL="0">
+              <a:buNone/>
+            </a:pPr>
+            <a:r>
+              <a:rPr lang="en-US" sz="1200" b="1" spc="200" kern="0" dirty="0">
+                <a:solidFill>
+                  <a:schemeClr val="accent1"/>
+                </a:solidFill>
+              </a:rPr>
               <a:t>NEXT · CHAPTER 8</a:t>
             </a:r>
             <a:endParaRPr lang="en-US" sz="1200" dirty="0"/>
@@ -16017,7 +17088,7 @@
             <a:pPr algn="r"/>
             <a:fld id="{F7021451-1387-4CA6-816F-3879F97B5CBC}" type="slidenum">
               <a:rPr b="0" lang="en-US"/>
-              <a:t>23</a:t>
+              <a:t>24</a:t>
             </a:fld>
             <a:endParaRPr lang="en-US"/>
           </a:p>
@@ -16770,7 +17841,7 @@
                 <a:ea typeface="Cambria" pitchFamily="34" charset="-122"/>
                 <a:cs typeface="Cambria" pitchFamily="34" charset="-120"/>
               </a:rPr>
-              <a:t>Five sections, a worked example and a lab</a:t>
+              <a:t>Five sections, a worked example, a case and a lab</a:t>
             </a:r>
             <a:endParaRPr lang="en-US" sz="3200" dirty="0"/>
           </a:p>
@@ -17661,7 +18732,7 @@
                   <a:schemeClr val="accent1"/>
                 </a:solidFill>
               </a:rPr>
-              <a:t>AXIOM Lab 2.7</a:t>
+              <a:t>In Practice</a:t>
             </a:r>
             <a:endParaRPr lang="en-US" sz="1300" dirty="0"/>
           </a:p>
@@ -17700,7 +18771,7 @@
                 <a:ea typeface="Cambria" pitchFamily="34" charset="-122"/>
                 <a:cs typeface="Cambria" pitchFamily="34" charset="-120"/>
               </a:rPr>
-              <a:t>Valuing Every Position: Rules for Meridian's Capability</a:t>
+              <a:t>American Airlines Prices Its Last Seat</a:t>
             </a:r>
             <a:endParaRPr lang="en-US" sz="1500" dirty="0"/>
           </a:p>
@@ -17715,6 +18786,144 @@
         <p:spPr>
           <a:xfrm>
             <a:off x="6415888" y="5660136"/>
+            <a:ext cx="2202104" cy="384048"/>
+          </a:xfrm>
+          <a:prstGeom prst="rect">
+            <a:avLst/>
+          </a:prstGeom>
+          <a:noFill/>
+          <a:ln/>
+        </p:spPr>
+        <p:txBody>
+          <a:bodyPr wrap="square" lIns="0" tIns="0" rIns="0" bIns="0" rtlCol="0" anchor="t"/>
+          <a:lstStyle/>
+          <a:p>
+            <a:pPr indent="0" marL="0">
+              <a:buNone/>
+            </a:pPr>
+            <a:r>
+              <a:rPr lang="en-US" sz="1300" dirty="0">
+                <a:solidFill>
+                  <a:schemeClr val="tx2"/>
+                </a:solidFill>
+              </a:rPr>
+              <a:t>At a Glance · board questions</a:t>
+            </a:r>
+            <a:endParaRPr lang="en-US" sz="1300" dirty="0"/>
+          </a:p>
+        </p:txBody>
+      </p:sp>
+      <p:sp>
+        <p:nvSpPr>
+          <p:cNvPr id="33" name="Card"/>
+          <p:cNvSpPr/>
+          <p:nvPr/>
+        </p:nvSpPr>
+        <p:spPr>
+          <a:xfrm>
+            <a:off x="9075191" y="4069080"/>
+            <a:ext cx="2567864" cy="2103120"/>
+          </a:xfrm>
+          <a:prstGeom prst="roundRect">
+            <a:avLst>
+              <a:gd name="adj" fmla="val 3478"/>
+            </a:avLst>
+          </a:prstGeom>
+          <a:solidFill>
+            <a:schemeClr val="bg2"/>
+          </a:solidFill>
+          <a:ln w="9525">
+            <a:solidFill>
+              <a:srgbClr val="C4CBD8"/>
+            </a:solidFill>
+            <a:prstDash val="solid"/>
+          </a:ln>
+        </p:spPr>
+      </p:sp>
+      <p:sp>
+        <p:nvSpPr>
+          <p:cNvPr id="34" name="Card label"/>
+          <p:cNvSpPr txBox="1"/>
+          <p:nvPr/>
+        </p:nvSpPr>
+        <p:spPr>
+          <a:xfrm>
+            <a:off x="9258071" y="4197096"/>
+            <a:ext cx="2202104" cy="310896"/>
+          </a:xfrm>
+          <a:prstGeom prst="rect">
+            <a:avLst/>
+          </a:prstGeom>
+          <a:noFill/>
+          <a:ln/>
+        </p:spPr>
+        <p:txBody>
+          <a:bodyPr wrap="square" lIns="0" tIns="0" rIns="0" bIns="0" rtlCol="0" anchor="ctr"/>
+          <a:lstStyle/>
+          <a:p>
+            <a:pPr indent="0" marL="0">
+              <a:buNone/>
+            </a:pPr>
+            <a:r>
+              <a:rPr lang="en-US" sz="1300" b="1" dirty="0">
+                <a:solidFill>
+                  <a:schemeClr val="accent1"/>
+                </a:solidFill>
+              </a:rPr>
+              <a:t>AXIOM Lab 2.7</a:t>
+            </a:r>
+            <a:endParaRPr lang="en-US" sz="1300" dirty="0"/>
+          </a:p>
+        </p:txBody>
+      </p:sp>
+      <p:sp>
+        <p:nvSpPr>
+          <p:cNvPr id="35" name="Card head"/>
+          <p:cNvSpPr txBox="1"/>
+          <p:nvPr/>
+        </p:nvSpPr>
+        <p:spPr>
+          <a:xfrm>
+            <a:off x="9258071" y="4526280"/>
+            <a:ext cx="2202104" cy="1060704"/>
+          </a:xfrm>
+          <a:prstGeom prst="rect">
+            <a:avLst/>
+          </a:prstGeom>
+          <a:noFill/>
+          <a:ln/>
+        </p:spPr>
+        <p:txBody>
+          <a:bodyPr wrap="square" lIns="0" tIns="0" rIns="0" bIns="0" rtlCol="0" anchor="t"/>
+          <a:lstStyle/>
+          <a:p>
+            <a:pPr indent="0" marL="0">
+              <a:buNone/>
+            </a:pPr>
+            <a:r>
+              <a:rPr lang="en-US" sz="1500" b="1" dirty="0">
+                <a:solidFill>
+                  <a:schemeClr val="tx1"/>
+                </a:solidFill>
+                <a:latin typeface="Cambria" pitchFamily="34" charset="0"/>
+                <a:ea typeface="Cambria" pitchFamily="34" charset="-122"/>
+                <a:cs typeface="Cambria" pitchFamily="34" charset="-120"/>
+              </a:rPr>
+              <a:t>Valuing Every Position: Rules for Meridian's Capability</a:t>
+            </a:r>
+            <a:endParaRPr lang="en-US" sz="1500" dirty="0"/>
+          </a:p>
+        </p:txBody>
+      </p:sp>
+      <p:sp>
+        <p:nvSpPr>
+          <p:cNvPr id="36" name="Card text"/>
+          <p:cNvSpPr txBox="1"/>
+          <p:nvPr/>
+        </p:nvSpPr>
+        <p:spPr>
+          <a:xfrm>
+            <a:off x="9258071" y="5660136"/>
             <a:ext cx="2202104" cy="384048"/>
           </a:xfrm>
           <a:prstGeom prst="rect">
